--- a/docs/pptx/carbo/ritu-carbo-linsubhr-dosedisc-grade2.pptx
+++ b/docs/pptx/carbo/ritu-carbo-linsubhr-dosedisc-grade2.pptx
@@ -2443,7 +2443,7 @@
           </p:nvSpPr>
           <p:spPr>
             <a:xfrm>
-              <a:off x="909675" y="1896563"/>
+              <a:off x="911833" y="1896563"/>
               <a:ext cx="0" cy="3826579"/>
             </a:xfrm>
             <a:custGeom>
@@ -2486,7 +2486,7 @@
           </p:nvSpPr>
           <p:spPr>
             <a:xfrm>
-              <a:off x="3323794" y="1896563"/>
+              <a:off x="3322810" y="1896563"/>
               <a:ext cx="0" cy="3826579"/>
             </a:xfrm>
             <a:custGeom>
@@ -2529,7 +2529,7 @@
           </p:nvSpPr>
           <p:spPr>
             <a:xfrm>
-              <a:off x="5737913" y="1896563"/>
+              <a:off x="5733788" y="1896563"/>
               <a:ext cx="0" cy="3826579"/>
             </a:xfrm>
             <a:custGeom>
@@ -2572,7 +2572,7 @@
           </p:nvSpPr>
           <p:spPr>
             <a:xfrm>
-              <a:off x="8152032" y="1896563"/>
+              <a:off x="8144765" y="1896563"/>
               <a:ext cx="0" cy="3826579"/>
             </a:xfrm>
             <a:custGeom>
@@ -2830,7 +2830,7 @@
           </p:nvSpPr>
           <p:spPr>
             <a:xfrm>
-              <a:off x="2116734" y="1896563"/>
+              <a:off x="2117321" y="1896563"/>
               <a:ext cx="0" cy="3826579"/>
             </a:xfrm>
             <a:custGeom>
@@ -2873,7 +2873,7 @@
           </p:nvSpPr>
           <p:spPr>
             <a:xfrm>
-              <a:off x="4530853" y="1896563"/>
+              <a:off x="4528299" y="1896563"/>
               <a:ext cx="0" cy="3826579"/>
             </a:xfrm>
             <a:custGeom>
@@ -2916,7 +2916,7 @@
           </p:nvSpPr>
           <p:spPr>
             <a:xfrm>
-              <a:off x="6944973" y="1896563"/>
+              <a:off x="6939276" y="1896563"/>
               <a:ext cx="0" cy="3826579"/>
             </a:xfrm>
             <a:custGeom>
@@ -2959,612 +2959,612 @@
           </p:nvSpPr>
           <p:spPr>
             <a:xfrm>
-              <a:off x="1172049" y="2147758"/>
-              <a:ext cx="7090630" cy="3136205"/>
+              <a:off x="1172049" y="2031675"/>
+              <a:ext cx="7090630" cy="3258420"/>
             </a:xfrm>
             <a:custGeom>
               <a:avLst/>
               <a:pathLst>
-                <a:path w="7090630" h="3136205">
+                <a:path w="7090630" h="3258420">
                   <a:moveTo>
-                    <a:pt x="0" y="2555696"/>
+                    <a:pt x="0" y="2690239"/>
                   </a:moveTo>
                   <a:lnTo>
-                    <a:pt x="71622" y="2555184"/>
-                  </a:lnTo>
-                  <a:lnTo>
-                    <a:pt x="143245" y="2554672"/>
-                  </a:lnTo>
-                  <a:lnTo>
-                    <a:pt x="214867" y="2554159"/>
-                  </a:lnTo>
-                  <a:lnTo>
-                    <a:pt x="286490" y="2553646"/>
-                  </a:lnTo>
-                  <a:lnTo>
-                    <a:pt x="358112" y="2553132"/>
-                  </a:lnTo>
-                  <a:lnTo>
-                    <a:pt x="429735" y="2552619"/>
-                  </a:lnTo>
-                  <a:lnTo>
-                    <a:pt x="501357" y="2552104"/>
-                  </a:lnTo>
-                  <a:lnTo>
-                    <a:pt x="572980" y="2551590"/>
-                  </a:lnTo>
-                  <a:lnTo>
-                    <a:pt x="644602" y="2551075"/>
-                  </a:lnTo>
-                  <a:lnTo>
-                    <a:pt x="716225" y="2550560"/>
-                  </a:lnTo>
-                  <a:lnTo>
-                    <a:pt x="787847" y="2550045"/>
-                  </a:lnTo>
-                  <a:lnTo>
-                    <a:pt x="859470" y="2549530"/>
-                  </a:lnTo>
-                  <a:lnTo>
-                    <a:pt x="931092" y="2549014"/>
-                  </a:lnTo>
-                  <a:lnTo>
-                    <a:pt x="1002715" y="2548497"/>
-                  </a:lnTo>
-                  <a:lnTo>
-                    <a:pt x="1074337" y="2547981"/>
-                  </a:lnTo>
-                  <a:lnTo>
-                    <a:pt x="1145960" y="2547464"/>
-                  </a:lnTo>
-                  <a:lnTo>
-                    <a:pt x="1217582" y="2546947"/>
-                  </a:lnTo>
-                  <a:lnTo>
-                    <a:pt x="1289205" y="2546429"/>
-                  </a:lnTo>
-                  <a:lnTo>
-                    <a:pt x="1360827" y="2545912"/>
-                  </a:lnTo>
-                  <a:lnTo>
-                    <a:pt x="1432450" y="2545393"/>
-                  </a:lnTo>
-                  <a:lnTo>
-                    <a:pt x="1504073" y="2544875"/>
-                  </a:lnTo>
-                  <a:lnTo>
-                    <a:pt x="1575695" y="2544356"/>
-                  </a:lnTo>
-                  <a:lnTo>
-                    <a:pt x="1647318" y="2543837"/>
-                  </a:lnTo>
-                  <a:lnTo>
-                    <a:pt x="1718940" y="2543318"/>
-                  </a:lnTo>
-                  <a:lnTo>
-                    <a:pt x="1790563" y="2542798"/>
-                  </a:lnTo>
-                  <a:lnTo>
-                    <a:pt x="1862185" y="2542278"/>
-                  </a:lnTo>
-                  <a:lnTo>
-                    <a:pt x="1933808" y="2541758"/>
-                  </a:lnTo>
-                  <a:lnTo>
-                    <a:pt x="2005430" y="2541237"/>
-                  </a:lnTo>
-                  <a:lnTo>
-                    <a:pt x="2077053" y="2540716"/>
-                  </a:lnTo>
-                  <a:lnTo>
-                    <a:pt x="2148675" y="2540195"/>
-                  </a:lnTo>
-                  <a:lnTo>
-                    <a:pt x="2220298" y="2539674"/>
-                  </a:lnTo>
-                  <a:lnTo>
-                    <a:pt x="2291920" y="2539152"/>
-                  </a:lnTo>
-                  <a:lnTo>
-                    <a:pt x="2363543" y="2538629"/>
-                  </a:lnTo>
-                  <a:lnTo>
-                    <a:pt x="2435165" y="2538107"/>
-                  </a:lnTo>
-                  <a:lnTo>
-                    <a:pt x="2506788" y="2537584"/>
-                  </a:lnTo>
-                  <a:lnTo>
-                    <a:pt x="2578410" y="2537061"/>
-                  </a:lnTo>
-                  <a:lnTo>
-                    <a:pt x="2650033" y="2536538"/>
-                  </a:lnTo>
-                  <a:lnTo>
-                    <a:pt x="2721655" y="2536014"/>
-                  </a:lnTo>
-                  <a:lnTo>
-                    <a:pt x="2793278" y="2535490"/>
-                  </a:lnTo>
-                  <a:lnTo>
-                    <a:pt x="2864901" y="2534965"/>
-                  </a:lnTo>
-                  <a:lnTo>
-                    <a:pt x="2936523" y="2534440"/>
-                  </a:lnTo>
-                  <a:lnTo>
-                    <a:pt x="3008146" y="2533915"/>
-                  </a:lnTo>
-                  <a:lnTo>
-                    <a:pt x="3079768" y="2533390"/>
-                  </a:lnTo>
-                  <a:lnTo>
-                    <a:pt x="3151391" y="2532864"/>
-                  </a:lnTo>
-                  <a:lnTo>
-                    <a:pt x="3223013" y="2532338"/>
-                  </a:lnTo>
-                  <a:lnTo>
-                    <a:pt x="3294636" y="2531812"/>
-                  </a:lnTo>
-                  <a:lnTo>
-                    <a:pt x="3366258" y="2510866"/>
-                  </a:lnTo>
-                  <a:lnTo>
-                    <a:pt x="3437881" y="2487617"/>
-                  </a:lnTo>
-                  <a:lnTo>
-                    <a:pt x="3509503" y="2463760"/>
-                  </a:lnTo>
-                  <a:lnTo>
-                    <a:pt x="3581126" y="2439281"/>
-                  </a:lnTo>
-                  <a:lnTo>
-                    <a:pt x="3652748" y="2414163"/>
-                  </a:lnTo>
-                  <a:lnTo>
-                    <a:pt x="3724371" y="2388390"/>
-                  </a:lnTo>
-                  <a:lnTo>
-                    <a:pt x="3795993" y="2361943"/>
-                  </a:lnTo>
-                  <a:lnTo>
-                    <a:pt x="3867616" y="2334806"/>
-                  </a:lnTo>
-                  <a:lnTo>
-                    <a:pt x="3939238" y="2306960"/>
-                  </a:lnTo>
-                  <a:lnTo>
-                    <a:pt x="4010861" y="2278388"/>
-                  </a:lnTo>
-                  <a:lnTo>
-                    <a:pt x="4082483" y="2249070"/>
-                  </a:lnTo>
-                  <a:lnTo>
-                    <a:pt x="4154106" y="2218986"/>
-                  </a:lnTo>
-                  <a:lnTo>
-                    <a:pt x="4225729" y="2188117"/>
-                  </a:lnTo>
-                  <a:lnTo>
-                    <a:pt x="4297351" y="2156442"/>
-                  </a:lnTo>
-                  <a:lnTo>
-                    <a:pt x="4368974" y="2123940"/>
-                  </a:lnTo>
-                  <a:lnTo>
-                    <a:pt x="4440596" y="2090590"/>
-                  </a:lnTo>
-                  <a:lnTo>
-                    <a:pt x="4512219" y="2056369"/>
-                  </a:lnTo>
-                  <a:lnTo>
-                    <a:pt x="4583841" y="2021255"/>
-                  </a:lnTo>
-                  <a:lnTo>
-                    <a:pt x="4655464" y="1985224"/>
-                  </a:lnTo>
-                  <a:lnTo>
-                    <a:pt x="4727086" y="1948252"/>
-                  </a:lnTo>
-                  <a:lnTo>
-                    <a:pt x="4798709" y="1910316"/>
-                  </a:lnTo>
-                  <a:lnTo>
-                    <a:pt x="4870331" y="1871388"/>
-                  </a:lnTo>
-                  <a:lnTo>
-                    <a:pt x="4941954" y="1831445"/>
-                  </a:lnTo>
-                  <a:lnTo>
-                    <a:pt x="5013576" y="1790459"/>
-                  </a:lnTo>
-                  <a:lnTo>
-                    <a:pt x="5085199" y="1748403"/>
-                  </a:lnTo>
-                  <a:lnTo>
-                    <a:pt x="5156821" y="1705249"/>
-                  </a:lnTo>
-                  <a:lnTo>
-                    <a:pt x="5228444" y="1660969"/>
-                  </a:lnTo>
-                  <a:lnTo>
-                    <a:pt x="5300066" y="1615532"/>
-                  </a:lnTo>
-                  <a:lnTo>
-                    <a:pt x="5371689" y="1568909"/>
-                  </a:lnTo>
-                  <a:lnTo>
-                    <a:pt x="5443311" y="1521070"/>
-                  </a:lnTo>
-                  <a:lnTo>
-                    <a:pt x="5514934" y="1471981"/>
-                  </a:lnTo>
-                  <a:lnTo>
-                    <a:pt x="5586557" y="1421611"/>
-                  </a:lnTo>
-                  <a:lnTo>
-                    <a:pt x="5658179" y="1369926"/>
-                  </a:lnTo>
-                  <a:lnTo>
-                    <a:pt x="5729802" y="1316891"/>
-                  </a:lnTo>
-                  <a:lnTo>
-                    <a:pt x="5801424" y="1262472"/>
-                  </a:lnTo>
-                  <a:lnTo>
-                    <a:pt x="5873047" y="1206633"/>
-                  </a:lnTo>
-                  <a:lnTo>
-                    <a:pt x="5944669" y="1149336"/>
-                  </a:lnTo>
-                  <a:lnTo>
-                    <a:pt x="6016292" y="1090543"/>
-                  </a:lnTo>
-                  <a:lnTo>
-                    <a:pt x="6087914" y="1030215"/>
-                  </a:lnTo>
-                  <a:lnTo>
-                    <a:pt x="6159537" y="968312"/>
-                  </a:lnTo>
-                  <a:lnTo>
-                    <a:pt x="6231159" y="904793"/>
-                  </a:lnTo>
-                  <a:lnTo>
-                    <a:pt x="6302782" y="839616"/>
-                  </a:lnTo>
-                  <a:lnTo>
-                    <a:pt x="6374404" y="772738"/>
-                  </a:lnTo>
-                  <a:lnTo>
-                    <a:pt x="6446027" y="704113"/>
-                  </a:lnTo>
-                  <a:lnTo>
-                    <a:pt x="6517649" y="633697"/>
-                  </a:lnTo>
-                  <a:lnTo>
-                    <a:pt x="6589272" y="561443"/>
-                  </a:lnTo>
-                  <a:lnTo>
-                    <a:pt x="6660894" y="487303"/>
-                  </a:lnTo>
-                  <a:lnTo>
-                    <a:pt x="6732517" y="411227"/>
-                  </a:lnTo>
-                  <a:lnTo>
-                    <a:pt x="6804139" y="333165"/>
-                  </a:lnTo>
-                  <a:lnTo>
-                    <a:pt x="6875762" y="253065"/>
-                  </a:lnTo>
-                  <a:lnTo>
-                    <a:pt x="6947385" y="170874"/>
-                  </a:lnTo>
-                  <a:lnTo>
-                    <a:pt x="7019007" y="86538"/>
+                    <a:pt x="71622" y="2689339"/>
+                  </a:lnTo>
+                  <a:lnTo>
+                    <a:pt x="143245" y="2688438"/>
+                  </a:lnTo>
+                  <a:lnTo>
+                    <a:pt x="214867" y="2687536"/>
+                  </a:lnTo>
+                  <a:lnTo>
+                    <a:pt x="286490" y="2686633"/>
+                  </a:lnTo>
+                  <a:lnTo>
+                    <a:pt x="358112" y="2685729"/>
+                  </a:lnTo>
+                  <a:lnTo>
+                    <a:pt x="429735" y="2684825"/>
+                  </a:lnTo>
+                  <a:lnTo>
+                    <a:pt x="501357" y="2683919"/>
+                  </a:lnTo>
+                  <a:lnTo>
+                    <a:pt x="572980" y="2683012"/>
+                  </a:lnTo>
+                  <a:lnTo>
+                    <a:pt x="644602" y="2682105"/>
+                  </a:lnTo>
+                  <a:lnTo>
+                    <a:pt x="716225" y="2681196"/>
+                  </a:lnTo>
+                  <a:lnTo>
+                    <a:pt x="787847" y="2680286"/>
+                  </a:lnTo>
+                  <a:lnTo>
+                    <a:pt x="859470" y="2679375"/>
+                  </a:lnTo>
+                  <a:lnTo>
+                    <a:pt x="931092" y="2678464"/>
+                  </a:lnTo>
+                  <a:lnTo>
+                    <a:pt x="1002715" y="2677551"/>
+                  </a:lnTo>
+                  <a:lnTo>
+                    <a:pt x="1074337" y="2676637"/>
+                  </a:lnTo>
+                  <a:lnTo>
+                    <a:pt x="1145960" y="2675723"/>
+                  </a:lnTo>
+                  <a:lnTo>
+                    <a:pt x="1217582" y="2674807"/>
+                  </a:lnTo>
+                  <a:lnTo>
+                    <a:pt x="1289205" y="2673891"/>
+                  </a:lnTo>
+                  <a:lnTo>
+                    <a:pt x="1360827" y="2672973"/>
+                  </a:lnTo>
+                  <a:lnTo>
+                    <a:pt x="1432450" y="2672054"/>
+                  </a:lnTo>
+                  <a:lnTo>
+                    <a:pt x="1504073" y="2671135"/>
+                  </a:lnTo>
+                  <a:lnTo>
+                    <a:pt x="1575695" y="2670214"/>
+                  </a:lnTo>
+                  <a:lnTo>
+                    <a:pt x="1647318" y="2669292"/>
+                  </a:lnTo>
+                  <a:lnTo>
+                    <a:pt x="1718940" y="2668370"/>
+                  </a:lnTo>
+                  <a:lnTo>
+                    <a:pt x="1790563" y="2667446"/>
+                  </a:lnTo>
+                  <a:lnTo>
+                    <a:pt x="1862185" y="2666521"/>
+                  </a:lnTo>
+                  <a:lnTo>
+                    <a:pt x="1933808" y="2665596"/>
+                  </a:lnTo>
+                  <a:lnTo>
+                    <a:pt x="2005430" y="2664669"/>
+                  </a:lnTo>
+                  <a:lnTo>
+                    <a:pt x="2077053" y="2663742"/>
+                  </a:lnTo>
+                  <a:lnTo>
+                    <a:pt x="2148675" y="2662813"/>
+                  </a:lnTo>
+                  <a:lnTo>
+                    <a:pt x="2220298" y="2661883"/>
+                  </a:lnTo>
+                  <a:lnTo>
+                    <a:pt x="2291920" y="2660952"/>
+                  </a:lnTo>
+                  <a:lnTo>
+                    <a:pt x="2363543" y="2660021"/>
+                  </a:lnTo>
+                  <a:lnTo>
+                    <a:pt x="2435165" y="2659088"/>
+                  </a:lnTo>
+                  <a:lnTo>
+                    <a:pt x="2506788" y="2658154"/>
+                  </a:lnTo>
+                  <a:lnTo>
+                    <a:pt x="2578410" y="2657220"/>
+                  </a:lnTo>
+                  <a:lnTo>
+                    <a:pt x="2650033" y="2656284"/>
+                  </a:lnTo>
+                  <a:lnTo>
+                    <a:pt x="2721655" y="2655347"/>
+                  </a:lnTo>
+                  <a:lnTo>
+                    <a:pt x="2793278" y="2654409"/>
+                  </a:lnTo>
+                  <a:lnTo>
+                    <a:pt x="2864901" y="2653470"/>
+                  </a:lnTo>
+                  <a:lnTo>
+                    <a:pt x="2936523" y="2652531"/>
+                  </a:lnTo>
+                  <a:lnTo>
+                    <a:pt x="3008146" y="2651590"/>
+                  </a:lnTo>
+                  <a:lnTo>
+                    <a:pt x="3079768" y="2650648"/>
+                  </a:lnTo>
+                  <a:lnTo>
+                    <a:pt x="3151391" y="2649705"/>
+                  </a:lnTo>
+                  <a:lnTo>
+                    <a:pt x="3223013" y="2648761"/>
+                  </a:lnTo>
+                  <a:lnTo>
+                    <a:pt x="3294636" y="2646938"/>
+                  </a:lnTo>
+                  <a:lnTo>
+                    <a:pt x="3366258" y="2623696"/>
+                  </a:lnTo>
+                  <a:lnTo>
+                    <a:pt x="3437881" y="2599834"/>
+                  </a:lnTo>
+                  <a:lnTo>
+                    <a:pt x="3509503" y="2575335"/>
+                  </a:lnTo>
+                  <a:lnTo>
+                    <a:pt x="3581126" y="2550182"/>
+                  </a:lnTo>
+                  <a:lnTo>
+                    <a:pt x="3652748" y="2524358"/>
+                  </a:lnTo>
+                  <a:lnTo>
+                    <a:pt x="3724371" y="2497844"/>
+                  </a:lnTo>
+                  <a:lnTo>
+                    <a:pt x="3795993" y="2470622"/>
+                  </a:lnTo>
+                  <a:lnTo>
+                    <a:pt x="3867616" y="2442674"/>
+                  </a:lnTo>
+                  <a:lnTo>
+                    <a:pt x="3939238" y="2413979"/>
+                  </a:lnTo>
+                  <a:lnTo>
+                    <a:pt x="4010861" y="2384519"/>
+                  </a:lnTo>
+                  <a:lnTo>
+                    <a:pt x="4082483" y="2354272"/>
+                  </a:lnTo>
+                  <a:lnTo>
+                    <a:pt x="4154106" y="2323217"/>
+                  </a:lnTo>
+                  <a:lnTo>
+                    <a:pt x="4225729" y="2291334"/>
+                  </a:lnTo>
+                  <a:lnTo>
+                    <a:pt x="4297351" y="2258599"/>
+                  </a:lnTo>
+                  <a:lnTo>
+                    <a:pt x="4368974" y="2224990"/>
+                  </a:lnTo>
+                  <a:lnTo>
+                    <a:pt x="4440596" y="2190484"/>
+                  </a:lnTo>
+                  <a:lnTo>
+                    <a:pt x="4512219" y="2155057"/>
+                  </a:lnTo>
+                  <a:lnTo>
+                    <a:pt x="4583841" y="2118684"/>
+                  </a:lnTo>
+                  <a:lnTo>
+                    <a:pt x="4655464" y="2081340"/>
+                  </a:lnTo>
+                  <a:lnTo>
+                    <a:pt x="4727086" y="2043000"/>
+                  </a:lnTo>
+                  <a:lnTo>
+                    <a:pt x="4798709" y="2003635"/>
+                  </a:lnTo>
+                  <a:lnTo>
+                    <a:pt x="4870331" y="1963220"/>
+                  </a:lnTo>
+                  <a:lnTo>
+                    <a:pt x="4941954" y="1921726"/>
+                  </a:lnTo>
+                  <a:lnTo>
+                    <a:pt x="5013576" y="1879124"/>
+                  </a:lnTo>
+                  <a:lnTo>
+                    <a:pt x="5085199" y="1835385"/>
+                  </a:lnTo>
+                  <a:lnTo>
+                    <a:pt x="5156821" y="1790478"/>
+                  </a:lnTo>
+                  <a:lnTo>
+                    <a:pt x="5228444" y="1744372"/>
+                  </a:lnTo>
+                  <a:lnTo>
+                    <a:pt x="5300066" y="1697036"/>
+                  </a:lnTo>
+                  <a:lnTo>
+                    <a:pt x="5371689" y="1648436"/>
+                  </a:lnTo>
+                  <a:lnTo>
+                    <a:pt x="5443311" y="1598538"/>
+                  </a:lnTo>
+                  <a:lnTo>
+                    <a:pt x="5514934" y="1547308"/>
+                  </a:lnTo>
+                  <a:lnTo>
+                    <a:pt x="5586557" y="1494711"/>
+                  </a:lnTo>
+                  <a:lnTo>
+                    <a:pt x="5658179" y="1440709"/>
+                  </a:lnTo>
+                  <a:lnTo>
+                    <a:pt x="5729802" y="1385266"/>
+                  </a:lnTo>
+                  <a:lnTo>
+                    <a:pt x="5801424" y="1328343"/>
+                  </a:lnTo>
+                  <a:lnTo>
+                    <a:pt x="5873047" y="1269900"/>
+                  </a:lnTo>
+                  <a:lnTo>
+                    <a:pt x="5944669" y="1209897"/>
+                  </a:lnTo>
+                  <a:lnTo>
+                    <a:pt x="6016292" y="1148292"/>
+                  </a:lnTo>
+                  <a:lnTo>
+                    <a:pt x="6087914" y="1085042"/>
+                  </a:lnTo>
+                  <a:lnTo>
+                    <a:pt x="6159537" y="1020104"/>
+                  </a:lnTo>
+                  <a:lnTo>
+                    <a:pt x="6231159" y="953432"/>
+                  </a:lnTo>
+                  <a:lnTo>
+                    <a:pt x="6302782" y="884981"/>
+                  </a:lnTo>
+                  <a:lnTo>
+                    <a:pt x="6374404" y="814702"/>
+                  </a:lnTo>
+                  <a:lnTo>
+                    <a:pt x="6446027" y="742547"/>
+                  </a:lnTo>
+                  <a:lnTo>
+                    <a:pt x="6517649" y="668465"/>
+                  </a:lnTo>
+                  <a:lnTo>
+                    <a:pt x="6589272" y="592406"/>
+                  </a:lnTo>
+                  <a:lnTo>
+                    <a:pt x="6660894" y="514316"/>
+                  </a:lnTo>
+                  <a:lnTo>
+                    <a:pt x="6732517" y="434142"/>
+                  </a:lnTo>
+                  <a:lnTo>
+                    <a:pt x="6804139" y="351828"/>
+                  </a:lnTo>
+                  <a:lnTo>
+                    <a:pt x="6875762" y="267315"/>
+                  </a:lnTo>
+                  <a:lnTo>
+                    <a:pt x="6947385" y="180547"/>
+                  </a:lnTo>
+                  <a:lnTo>
+                    <a:pt x="7019007" y="91462"/>
                   </a:lnTo>
                   <a:lnTo>
                     <a:pt x="7090630" y="0"/>
                   </a:lnTo>
                   <a:lnTo>
-                    <a:pt x="7090630" y="2503456"/>
-                  </a:lnTo>
-                  <a:lnTo>
-                    <a:pt x="7019007" y="2503999"/>
-                  </a:lnTo>
-                  <a:lnTo>
-                    <a:pt x="6947385" y="2504542"/>
-                  </a:lnTo>
-                  <a:lnTo>
-                    <a:pt x="6875762" y="2505085"/>
-                  </a:lnTo>
-                  <a:lnTo>
-                    <a:pt x="6804139" y="2505628"/>
-                  </a:lnTo>
-                  <a:lnTo>
-                    <a:pt x="6732517" y="2506170"/>
-                  </a:lnTo>
-                  <a:lnTo>
-                    <a:pt x="6660894" y="2506712"/>
-                  </a:lnTo>
-                  <a:lnTo>
-                    <a:pt x="6589272" y="2507253"/>
-                  </a:lnTo>
-                  <a:lnTo>
-                    <a:pt x="6517649" y="2507794"/>
-                  </a:lnTo>
-                  <a:lnTo>
-                    <a:pt x="6446027" y="2508335"/>
-                  </a:lnTo>
-                  <a:lnTo>
-                    <a:pt x="6374404" y="2508876"/>
-                  </a:lnTo>
-                  <a:lnTo>
-                    <a:pt x="6302782" y="2509416"/>
-                  </a:lnTo>
-                  <a:lnTo>
-                    <a:pt x="6231159" y="2509956"/>
-                  </a:lnTo>
-                  <a:lnTo>
-                    <a:pt x="6159537" y="2510496"/>
-                  </a:lnTo>
-                  <a:lnTo>
-                    <a:pt x="6087914" y="2511035"/>
-                  </a:lnTo>
-                  <a:lnTo>
-                    <a:pt x="6016292" y="2511574"/>
-                  </a:lnTo>
-                  <a:lnTo>
-                    <a:pt x="5944669" y="2512112"/>
-                  </a:lnTo>
-                  <a:lnTo>
-                    <a:pt x="5873047" y="2512650"/>
-                  </a:lnTo>
-                  <a:lnTo>
-                    <a:pt x="5801424" y="2513188"/>
-                  </a:lnTo>
-                  <a:lnTo>
-                    <a:pt x="5729802" y="2513726"/>
-                  </a:lnTo>
-                  <a:lnTo>
-                    <a:pt x="5658179" y="2514263"/>
-                  </a:lnTo>
-                  <a:lnTo>
-                    <a:pt x="5586557" y="2514800"/>
-                  </a:lnTo>
-                  <a:lnTo>
-                    <a:pt x="5514934" y="2515337"/>
-                  </a:lnTo>
-                  <a:lnTo>
-                    <a:pt x="5443311" y="2515873"/>
-                  </a:lnTo>
-                  <a:lnTo>
-                    <a:pt x="5371689" y="2516409"/>
-                  </a:lnTo>
-                  <a:lnTo>
-                    <a:pt x="5300066" y="2516945"/>
-                  </a:lnTo>
-                  <a:lnTo>
-                    <a:pt x="5228444" y="2517480"/>
-                  </a:lnTo>
-                  <a:lnTo>
-                    <a:pt x="5156821" y="2518015"/>
-                  </a:lnTo>
-                  <a:lnTo>
-                    <a:pt x="5085199" y="2518550"/>
-                  </a:lnTo>
-                  <a:lnTo>
-                    <a:pt x="5013576" y="2519084"/>
-                  </a:lnTo>
-                  <a:lnTo>
-                    <a:pt x="4941954" y="2519618"/>
-                  </a:lnTo>
-                  <a:lnTo>
-                    <a:pt x="4870331" y="2520152"/>
-                  </a:lnTo>
-                  <a:lnTo>
-                    <a:pt x="4798709" y="2520685"/>
-                  </a:lnTo>
-                  <a:lnTo>
-                    <a:pt x="4727086" y="2521218"/>
-                  </a:lnTo>
-                  <a:lnTo>
-                    <a:pt x="4655464" y="2521751"/>
-                  </a:lnTo>
-                  <a:lnTo>
-                    <a:pt x="4583841" y="2522283"/>
-                  </a:lnTo>
-                  <a:lnTo>
-                    <a:pt x="4512219" y="2522816"/>
-                  </a:lnTo>
-                  <a:lnTo>
-                    <a:pt x="4440596" y="2523347"/>
-                  </a:lnTo>
-                  <a:lnTo>
-                    <a:pt x="4368974" y="2523879"/>
-                  </a:lnTo>
-                  <a:lnTo>
-                    <a:pt x="4297351" y="2524410"/>
-                  </a:lnTo>
-                  <a:lnTo>
-                    <a:pt x="4225729" y="2524941"/>
-                  </a:lnTo>
-                  <a:lnTo>
-                    <a:pt x="4154106" y="2525471"/>
-                  </a:lnTo>
-                  <a:lnTo>
-                    <a:pt x="4082483" y="2526001"/>
-                  </a:lnTo>
-                  <a:lnTo>
-                    <a:pt x="4010861" y="2526531"/>
-                  </a:lnTo>
-                  <a:lnTo>
-                    <a:pt x="3939238" y="2527061"/>
-                  </a:lnTo>
-                  <a:lnTo>
-                    <a:pt x="3867616" y="2527590"/>
-                  </a:lnTo>
-                  <a:lnTo>
-                    <a:pt x="3795993" y="2528119"/>
-                  </a:lnTo>
-                  <a:lnTo>
-                    <a:pt x="3724371" y="2528647"/>
-                  </a:lnTo>
-                  <a:lnTo>
-                    <a:pt x="3652748" y="2529176"/>
-                  </a:lnTo>
-                  <a:lnTo>
-                    <a:pt x="3581126" y="2529704"/>
-                  </a:lnTo>
-                  <a:lnTo>
-                    <a:pt x="3509503" y="2530231"/>
-                  </a:lnTo>
-                  <a:lnTo>
-                    <a:pt x="3437881" y="2530758"/>
-                  </a:lnTo>
-                  <a:lnTo>
-                    <a:pt x="3366258" y="2531285"/>
-                  </a:lnTo>
-                  <a:lnTo>
-                    <a:pt x="3294636" y="2533524"/>
-                  </a:lnTo>
-                  <a:lnTo>
-                    <a:pt x="3223013" y="2555605"/>
-                  </a:lnTo>
-                  <a:lnTo>
-                    <a:pt x="3151391" y="2577125"/>
-                  </a:lnTo>
-                  <a:lnTo>
-                    <a:pt x="3079768" y="2598097"/>
-                  </a:lnTo>
-                  <a:lnTo>
-                    <a:pt x="3008146" y="2618535"/>
-                  </a:lnTo>
-                  <a:lnTo>
-                    <a:pt x="2936523" y="2638454"/>
-                  </a:lnTo>
-                  <a:lnTo>
-                    <a:pt x="2864901" y="2657866"/>
-                  </a:lnTo>
-                  <a:lnTo>
-                    <a:pt x="2793278" y="2676783"/>
-                  </a:lnTo>
-                  <a:lnTo>
-                    <a:pt x="2721655" y="2695220"/>
-                  </a:lnTo>
-                  <a:lnTo>
-                    <a:pt x="2650033" y="2713188"/>
-                  </a:lnTo>
-                  <a:lnTo>
-                    <a:pt x="2578410" y="2730698"/>
-                  </a:lnTo>
-                  <a:lnTo>
-                    <a:pt x="2506788" y="2747763"/>
-                  </a:lnTo>
-                  <a:lnTo>
-                    <a:pt x="2435165" y="2764394"/>
-                  </a:lnTo>
-                  <a:lnTo>
-                    <a:pt x="2363543" y="2780601"/>
-                  </a:lnTo>
-                  <a:lnTo>
-                    <a:pt x="2291920" y="2796397"/>
-                  </a:lnTo>
-                  <a:lnTo>
-                    <a:pt x="2220298" y="2811790"/>
-                  </a:lnTo>
-                  <a:lnTo>
-                    <a:pt x="2148675" y="2826792"/>
-                  </a:lnTo>
-                  <a:lnTo>
-                    <a:pt x="2077053" y="2841412"/>
-                  </a:lnTo>
-                  <a:lnTo>
-                    <a:pt x="2005430" y="2855660"/>
-                  </a:lnTo>
-                  <a:lnTo>
-                    <a:pt x="1933808" y="2869546"/>
-                  </a:lnTo>
-                  <a:lnTo>
-                    <a:pt x="1862185" y="2883078"/>
-                  </a:lnTo>
-                  <a:lnTo>
-                    <a:pt x="1790563" y="2896267"/>
-                  </a:lnTo>
-                  <a:lnTo>
-                    <a:pt x="1718940" y="2909119"/>
-                  </a:lnTo>
-                  <a:lnTo>
-                    <a:pt x="1647318" y="2921645"/>
-                  </a:lnTo>
-                  <a:lnTo>
-                    <a:pt x="1575695" y="2933852"/>
-                  </a:lnTo>
-                  <a:lnTo>
-                    <a:pt x="1504073" y="2945748"/>
-                  </a:lnTo>
-                  <a:lnTo>
-                    <a:pt x="1432450" y="2957342"/>
-                  </a:lnTo>
-                  <a:lnTo>
-                    <a:pt x="1360827" y="2968641"/>
-                  </a:lnTo>
-                  <a:lnTo>
-                    <a:pt x="1289205" y="2979652"/>
-                  </a:lnTo>
-                  <a:lnTo>
-                    <a:pt x="1217582" y="2990383"/>
-                  </a:lnTo>
-                  <a:lnTo>
-                    <a:pt x="1145960" y="3000841"/>
-                  </a:lnTo>
-                  <a:lnTo>
-                    <a:pt x="1074337" y="3011033"/>
-                  </a:lnTo>
-                  <a:lnTo>
-                    <a:pt x="1002715" y="3020966"/>
-                  </a:lnTo>
-                  <a:lnTo>
-                    <a:pt x="931092" y="3030646"/>
-                  </a:lnTo>
-                  <a:lnTo>
-                    <a:pt x="859470" y="3040080"/>
-                  </a:lnTo>
-                  <a:lnTo>
-                    <a:pt x="787847" y="3049274"/>
-                  </a:lnTo>
-                  <a:lnTo>
-                    <a:pt x="716225" y="3058233"/>
-                  </a:lnTo>
-                  <a:lnTo>
-                    <a:pt x="644602" y="3066965"/>
-                  </a:lnTo>
-                  <a:lnTo>
-                    <a:pt x="572980" y="3075475"/>
-                  </a:lnTo>
-                  <a:lnTo>
-                    <a:pt x="501357" y="3083768"/>
-                  </a:lnTo>
-                  <a:lnTo>
-                    <a:pt x="429735" y="3091851"/>
-                  </a:lnTo>
-                  <a:lnTo>
-                    <a:pt x="358112" y="3099727"/>
-                  </a:lnTo>
-                  <a:lnTo>
-                    <a:pt x="286490" y="3107404"/>
-                  </a:lnTo>
-                  <a:lnTo>
-                    <a:pt x="214867" y="3114884"/>
-                  </a:lnTo>
-                  <a:lnTo>
-                    <a:pt x="143245" y="3122175"/>
-                  </a:lnTo>
-                  <a:lnTo>
-                    <a:pt x="71622" y="3129280"/>
-                  </a:lnTo>
-                  <a:lnTo>
-                    <a:pt x="0" y="3136205"/>
+                    <a:pt x="7090630" y="2596234"/>
+                  </a:lnTo>
+                  <a:lnTo>
+                    <a:pt x="7019007" y="2597235"/>
+                  </a:lnTo>
+                  <a:lnTo>
+                    <a:pt x="6947385" y="2598235"/>
+                  </a:lnTo>
+                  <a:lnTo>
+                    <a:pt x="6875762" y="2599234"/>
+                  </a:lnTo>
+                  <a:lnTo>
+                    <a:pt x="6804139" y="2600231"/>
+                  </a:lnTo>
+                  <a:lnTo>
+                    <a:pt x="6732517" y="2601228"/>
+                  </a:lnTo>
+                  <a:lnTo>
+                    <a:pt x="6660894" y="2602224"/>
+                  </a:lnTo>
+                  <a:lnTo>
+                    <a:pt x="6589272" y="2603218"/>
+                  </a:lnTo>
+                  <a:lnTo>
+                    <a:pt x="6517649" y="2604211"/>
+                  </a:lnTo>
+                  <a:lnTo>
+                    <a:pt x="6446027" y="2605204"/>
+                  </a:lnTo>
+                  <a:lnTo>
+                    <a:pt x="6374404" y="2606195"/>
+                  </a:lnTo>
+                  <a:lnTo>
+                    <a:pt x="6302782" y="2607185"/>
+                  </a:lnTo>
+                  <a:lnTo>
+                    <a:pt x="6231159" y="2608174"/>
+                  </a:lnTo>
+                  <a:lnTo>
+                    <a:pt x="6159537" y="2609162"/>
+                  </a:lnTo>
+                  <a:lnTo>
+                    <a:pt x="6087914" y="2610149"/>
+                  </a:lnTo>
+                  <a:lnTo>
+                    <a:pt x="6016292" y="2611135"/>
+                  </a:lnTo>
+                  <a:lnTo>
+                    <a:pt x="5944669" y="2612120"/>
+                  </a:lnTo>
+                  <a:lnTo>
+                    <a:pt x="5873047" y="2613104"/>
+                  </a:lnTo>
+                  <a:lnTo>
+                    <a:pt x="5801424" y="2614087"/>
+                  </a:lnTo>
+                  <a:lnTo>
+                    <a:pt x="5729802" y="2615068"/>
+                  </a:lnTo>
+                  <a:lnTo>
+                    <a:pt x="5658179" y="2616049"/>
+                  </a:lnTo>
+                  <a:lnTo>
+                    <a:pt x="5586557" y="2617028"/>
+                  </a:lnTo>
+                  <a:lnTo>
+                    <a:pt x="5514934" y="2618007"/>
+                  </a:lnTo>
+                  <a:lnTo>
+                    <a:pt x="5443311" y="2618984"/>
+                  </a:lnTo>
+                  <a:lnTo>
+                    <a:pt x="5371689" y="2619960"/>
+                  </a:lnTo>
+                  <a:lnTo>
+                    <a:pt x="5300066" y="2620935"/>
+                  </a:lnTo>
+                  <a:lnTo>
+                    <a:pt x="5228444" y="2621910"/>
+                  </a:lnTo>
+                  <a:lnTo>
+                    <a:pt x="5156821" y="2622883"/>
+                  </a:lnTo>
+                  <a:lnTo>
+                    <a:pt x="5085199" y="2623855"/>
+                  </a:lnTo>
+                  <a:lnTo>
+                    <a:pt x="5013576" y="2624826"/>
+                  </a:lnTo>
+                  <a:lnTo>
+                    <a:pt x="4941954" y="2625796"/>
+                  </a:lnTo>
+                  <a:lnTo>
+                    <a:pt x="4870331" y="2626765"/>
+                  </a:lnTo>
+                  <a:lnTo>
+                    <a:pt x="4798709" y="2627733"/>
+                  </a:lnTo>
+                  <a:lnTo>
+                    <a:pt x="4727086" y="2628699"/>
+                  </a:lnTo>
+                  <a:lnTo>
+                    <a:pt x="4655464" y="2629665"/>
+                  </a:lnTo>
+                  <a:lnTo>
+                    <a:pt x="4583841" y="2630630"/>
+                  </a:lnTo>
+                  <a:lnTo>
+                    <a:pt x="4512219" y="2631593"/>
+                  </a:lnTo>
+                  <a:lnTo>
+                    <a:pt x="4440596" y="2632556"/>
+                  </a:lnTo>
+                  <a:lnTo>
+                    <a:pt x="4368974" y="2633518"/>
+                  </a:lnTo>
+                  <a:lnTo>
+                    <a:pt x="4297351" y="2634478"/>
+                  </a:lnTo>
+                  <a:lnTo>
+                    <a:pt x="4225729" y="2635437"/>
+                  </a:lnTo>
+                  <a:lnTo>
+                    <a:pt x="4154106" y="2636396"/>
+                  </a:lnTo>
+                  <a:lnTo>
+                    <a:pt x="4082483" y="2637353"/>
+                  </a:lnTo>
+                  <a:lnTo>
+                    <a:pt x="4010861" y="2638310"/>
+                  </a:lnTo>
+                  <a:lnTo>
+                    <a:pt x="3939238" y="2639265"/>
+                  </a:lnTo>
+                  <a:lnTo>
+                    <a:pt x="3867616" y="2640219"/>
+                  </a:lnTo>
+                  <a:lnTo>
+                    <a:pt x="3795993" y="2641172"/>
+                  </a:lnTo>
+                  <a:lnTo>
+                    <a:pt x="3724371" y="2642125"/>
+                  </a:lnTo>
+                  <a:lnTo>
+                    <a:pt x="3652748" y="2643076"/>
+                  </a:lnTo>
+                  <a:lnTo>
+                    <a:pt x="3581126" y="2644026"/>
+                  </a:lnTo>
+                  <a:lnTo>
+                    <a:pt x="3509503" y="2644975"/>
+                  </a:lnTo>
+                  <a:lnTo>
+                    <a:pt x="3437881" y="2645923"/>
+                  </a:lnTo>
+                  <a:lnTo>
+                    <a:pt x="3366258" y="2646870"/>
+                  </a:lnTo>
+                  <a:lnTo>
+                    <a:pt x="3294636" y="2647816"/>
+                  </a:lnTo>
+                  <a:lnTo>
+                    <a:pt x="3223013" y="2669575"/>
+                  </a:lnTo>
+                  <a:lnTo>
+                    <a:pt x="3151391" y="2691624"/>
+                  </a:lnTo>
+                  <a:lnTo>
+                    <a:pt x="3079768" y="2713099"/>
+                  </a:lnTo>
+                  <a:lnTo>
+                    <a:pt x="3008146" y="2734016"/>
+                  </a:lnTo>
+                  <a:lnTo>
+                    <a:pt x="2936523" y="2754389"/>
+                  </a:lnTo>
+                  <a:lnTo>
+                    <a:pt x="2864901" y="2774232"/>
+                  </a:lnTo>
+                  <a:lnTo>
+                    <a:pt x="2793278" y="2793559"/>
+                  </a:lnTo>
+                  <a:lnTo>
+                    <a:pt x="2721655" y="2812384"/>
+                  </a:lnTo>
+                  <a:lnTo>
+                    <a:pt x="2650033" y="2830719"/>
+                  </a:lnTo>
+                  <a:lnTo>
+                    <a:pt x="2578410" y="2848578"/>
+                  </a:lnTo>
+                  <a:lnTo>
+                    <a:pt x="2506788" y="2865972"/>
+                  </a:lnTo>
+                  <a:lnTo>
+                    <a:pt x="2435165" y="2882914"/>
+                  </a:lnTo>
+                  <a:lnTo>
+                    <a:pt x="2363543" y="2899415"/>
+                  </a:lnTo>
+                  <a:lnTo>
+                    <a:pt x="2291920" y="2915487"/>
+                  </a:lnTo>
+                  <a:lnTo>
+                    <a:pt x="2220298" y="2931142"/>
+                  </a:lnTo>
+                  <a:lnTo>
+                    <a:pt x="2148675" y="2946389"/>
+                  </a:lnTo>
+                  <a:lnTo>
+                    <a:pt x="2077053" y="2961240"/>
+                  </a:lnTo>
+                  <a:lnTo>
+                    <a:pt x="2005430" y="2975704"/>
+                  </a:lnTo>
+                  <a:lnTo>
+                    <a:pt x="1933808" y="2989793"/>
+                  </a:lnTo>
+                  <a:lnTo>
+                    <a:pt x="1862185" y="3003515"/>
+                  </a:lnTo>
+                  <a:lnTo>
+                    <a:pt x="1790563" y="3016881"/>
+                  </a:lnTo>
+                  <a:lnTo>
+                    <a:pt x="1718940" y="3029899"/>
+                  </a:lnTo>
+                  <a:lnTo>
+                    <a:pt x="1647318" y="3042578"/>
+                  </a:lnTo>
+                  <a:lnTo>
+                    <a:pt x="1575695" y="3054928"/>
+                  </a:lnTo>
+                  <a:lnTo>
+                    <a:pt x="1504073" y="3066956"/>
+                  </a:lnTo>
+                  <a:lnTo>
+                    <a:pt x="1432450" y="3078672"/>
+                  </a:lnTo>
+                  <a:lnTo>
+                    <a:pt x="1360827" y="3090083"/>
+                  </a:lnTo>
+                  <a:lnTo>
+                    <a:pt x="1289205" y="3101198"/>
+                  </a:lnTo>
+                  <a:lnTo>
+                    <a:pt x="1217582" y="3112023"/>
+                  </a:lnTo>
+                  <a:lnTo>
+                    <a:pt x="1145960" y="3122567"/>
+                  </a:lnTo>
+                  <a:lnTo>
+                    <a:pt x="1074337" y="3132837"/>
+                  </a:lnTo>
+                  <a:lnTo>
+                    <a:pt x="1002715" y="3142840"/>
+                  </a:lnTo>
+                  <a:lnTo>
+                    <a:pt x="931092" y="3152583"/>
+                  </a:lnTo>
+                  <a:lnTo>
+                    <a:pt x="859470" y="3162072"/>
+                  </a:lnTo>
+                  <a:lnTo>
+                    <a:pt x="787847" y="3171315"/>
+                  </a:lnTo>
+                  <a:lnTo>
+                    <a:pt x="716225" y="3180317"/>
+                  </a:lnTo>
+                  <a:lnTo>
+                    <a:pt x="644602" y="3189085"/>
+                  </a:lnTo>
+                  <a:lnTo>
+                    <a:pt x="572980" y="3197626"/>
+                  </a:lnTo>
+                  <a:lnTo>
+                    <a:pt x="501357" y="3205944"/>
+                  </a:lnTo>
+                  <a:lnTo>
+                    <a:pt x="429735" y="3214046"/>
+                  </a:lnTo>
+                  <a:lnTo>
+                    <a:pt x="358112" y="3221937"/>
+                  </a:lnTo>
+                  <a:lnTo>
+                    <a:pt x="286490" y="3229623"/>
+                  </a:lnTo>
+                  <a:lnTo>
+                    <a:pt x="214867" y="3237109"/>
+                  </a:lnTo>
+                  <a:lnTo>
+                    <a:pt x="143245" y="3244401"/>
+                  </a:lnTo>
+                  <a:lnTo>
+                    <a:pt x="71622" y="3251503"/>
+                  </a:lnTo>
+                  <a:lnTo>
+                    <a:pt x="0" y="3258420"/>
                   </a:lnTo>
                   <a:close/>
                 </a:path>
@@ -3590,309 +3590,309 @@
           </p:nvSpPr>
           <p:spPr>
             <a:xfrm>
-              <a:off x="1172049" y="2147758"/>
-              <a:ext cx="7090630" cy="2555696"/>
+              <a:off x="1172049" y="2031675"/>
+              <a:ext cx="7090630" cy="2690239"/>
             </a:xfrm>
             <a:custGeom>
               <a:avLst/>
               <a:pathLst>
-                <a:path w="7090630" h="2555696">
+                <a:path w="7090630" h="2690239">
                   <a:moveTo>
-                    <a:pt x="0" y="2555696"/>
+                    <a:pt x="0" y="2690239"/>
                   </a:moveTo>
                   <a:lnTo>
-                    <a:pt x="71622" y="2555184"/>
-                  </a:lnTo>
-                  <a:lnTo>
-                    <a:pt x="143245" y="2554672"/>
-                  </a:lnTo>
-                  <a:lnTo>
-                    <a:pt x="214867" y="2554159"/>
-                  </a:lnTo>
-                  <a:lnTo>
-                    <a:pt x="286490" y="2553646"/>
-                  </a:lnTo>
-                  <a:lnTo>
-                    <a:pt x="358112" y="2553132"/>
-                  </a:lnTo>
-                  <a:lnTo>
-                    <a:pt x="429735" y="2552619"/>
-                  </a:lnTo>
-                  <a:lnTo>
-                    <a:pt x="501357" y="2552104"/>
-                  </a:lnTo>
-                  <a:lnTo>
-                    <a:pt x="572980" y="2551590"/>
-                  </a:lnTo>
-                  <a:lnTo>
-                    <a:pt x="644602" y="2551075"/>
-                  </a:lnTo>
-                  <a:lnTo>
-                    <a:pt x="716225" y="2550560"/>
-                  </a:lnTo>
-                  <a:lnTo>
-                    <a:pt x="787847" y="2550045"/>
-                  </a:lnTo>
-                  <a:lnTo>
-                    <a:pt x="859470" y="2549530"/>
-                  </a:lnTo>
-                  <a:lnTo>
-                    <a:pt x="931092" y="2549014"/>
-                  </a:lnTo>
-                  <a:lnTo>
-                    <a:pt x="1002715" y="2548497"/>
-                  </a:lnTo>
-                  <a:lnTo>
-                    <a:pt x="1074337" y="2547981"/>
-                  </a:lnTo>
-                  <a:lnTo>
-                    <a:pt x="1145960" y="2547464"/>
-                  </a:lnTo>
-                  <a:lnTo>
-                    <a:pt x="1217582" y="2546947"/>
-                  </a:lnTo>
-                  <a:lnTo>
-                    <a:pt x="1289205" y="2546429"/>
-                  </a:lnTo>
-                  <a:lnTo>
-                    <a:pt x="1360827" y="2545912"/>
-                  </a:lnTo>
-                  <a:lnTo>
-                    <a:pt x="1432450" y="2545393"/>
-                  </a:lnTo>
-                  <a:lnTo>
-                    <a:pt x="1504073" y="2544875"/>
-                  </a:lnTo>
-                  <a:lnTo>
-                    <a:pt x="1575695" y="2544356"/>
-                  </a:lnTo>
-                  <a:lnTo>
-                    <a:pt x="1647318" y="2543837"/>
-                  </a:lnTo>
-                  <a:lnTo>
-                    <a:pt x="1718940" y="2543318"/>
-                  </a:lnTo>
-                  <a:lnTo>
-                    <a:pt x="1790563" y="2542798"/>
-                  </a:lnTo>
-                  <a:lnTo>
-                    <a:pt x="1862185" y="2542278"/>
-                  </a:lnTo>
-                  <a:lnTo>
-                    <a:pt x="1933808" y="2541758"/>
-                  </a:lnTo>
-                  <a:lnTo>
-                    <a:pt x="2005430" y="2541237"/>
-                  </a:lnTo>
-                  <a:lnTo>
-                    <a:pt x="2077053" y="2540716"/>
-                  </a:lnTo>
-                  <a:lnTo>
-                    <a:pt x="2148675" y="2540195"/>
-                  </a:lnTo>
-                  <a:lnTo>
-                    <a:pt x="2220298" y="2539674"/>
-                  </a:lnTo>
-                  <a:lnTo>
-                    <a:pt x="2291920" y="2539152"/>
-                  </a:lnTo>
-                  <a:lnTo>
-                    <a:pt x="2363543" y="2538629"/>
-                  </a:lnTo>
-                  <a:lnTo>
-                    <a:pt x="2435165" y="2538107"/>
-                  </a:lnTo>
-                  <a:lnTo>
-                    <a:pt x="2506788" y="2537584"/>
-                  </a:lnTo>
-                  <a:lnTo>
-                    <a:pt x="2578410" y="2537061"/>
-                  </a:lnTo>
-                  <a:lnTo>
-                    <a:pt x="2650033" y="2536538"/>
-                  </a:lnTo>
-                  <a:lnTo>
-                    <a:pt x="2721655" y="2536014"/>
-                  </a:lnTo>
-                  <a:lnTo>
-                    <a:pt x="2793278" y="2535490"/>
-                  </a:lnTo>
-                  <a:lnTo>
-                    <a:pt x="2864901" y="2534965"/>
-                  </a:lnTo>
-                  <a:lnTo>
-                    <a:pt x="2936523" y="2534440"/>
-                  </a:lnTo>
-                  <a:lnTo>
-                    <a:pt x="3008146" y="2533915"/>
-                  </a:lnTo>
-                  <a:lnTo>
-                    <a:pt x="3079768" y="2533390"/>
-                  </a:lnTo>
-                  <a:lnTo>
-                    <a:pt x="3151391" y="2532864"/>
-                  </a:lnTo>
-                  <a:lnTo>
-                    <a:pt x="3223013" y="2532338"/>
-                  </a:lnTo>
-                  <a:lnTo>
-                    <a:pt x="3294636" y="2531812"/>
-                  </a:lnTo>
-                  <a:lnTo>
-                    <a:pt x="3366258" y="2510866"/>
-                  </a:lnTo>
-                  <a:lnTo>
-                    <a:pt x="3437881" y="2487617"/>
-                  </a:lnTo>
-                  <a:lnTo>
-                    <a:pt x="3509503" y="2463760"/>
-                  </a:lnTo>
-                  <a:lnTo>
-                    <a:pt x="3581126" y="2439281"/>
-                  </a:lnTo>
-                  <a:lnTo>
-                    <a:pt x="3652748" y="2414163"/>
-                  </a:lnTo>
-                  <a:lnTo>
-                    <a:pt x="3724371" y="2388390"/>
-                  </a:lnTo>
-                  <a:lnTo>
-                    <a:pt x="3795993" y="2361943"/>
-                  </a:lnTo>
-                  <a:lnTo>
-                    <a:pt x="3867616" y="2334806"/>
-                  </a:lnTo>
-                  <a:lnTo>
-                    <a:pt x="3939238" y="2306960"/>
-                  </a:lnTo>
-                  <a:lnTo>
-                    <a:pt x="4010861" y="2278388"/>
-                  </a:lnTo>
-                  <a:lnTo>
-                    <a:pt x="4082483" y="2249070"/>
-                  </a:lnTo>
-                  <a:lnTo>
-                    <a:pt x="4154106" y="2218986"/>
-                  </a:lnTo>
-                  <a:lnTo>
-                    <a:pt x="4225729" y="2188117"/>
-                  </a:lnTo>
-                  <a:lnTo>
-                    <a:pt x="4297351" y="2156442"/>
-                  </a:lnTo>
-                  <a:lnTo>
-                    <a:pt x="4368974" y="2123940"/>
-                  </a:lnTo>
-                  <a:lnTo>
-                    <a:pt x="4440596" y="2090590"/>
-                  </a:lnTo>
-                  <a:lnTo>
-                    <a:pt x="4512219" y="2056369"/>
-                  </a:lnTo>
-                  <a:lnTo>
-                    <a:pt x="4583841" y="2021255"/>
-                  </a:lnTo>
-                  <a:lnTo>
-                    <a:pt x="4655464" y="1985224"/>
-                  </a:lnTo>
-                  <a:lnTo>
-                    <a:pt x="4727086" y="1948252"/>
-                  </a:lnTo>
-                  <a:lnTo>
-                    <a:pt x="4798709" y="1910316"/>
-                  </a:lnTo>
-                  <a:lnTo>
-                    <a:pt x="4870331" y="1871388"/>
-                  </a:lnTo>
-                  <a:lnTo>
-                    <a:pt x="4941954" y="1831445"/>
-                  </a:lnTo>
-                  <a:lnTo>
-                    <a:pt x="5013576" y="1790459"/>
-                  </a:lnTo>
-                  <a:lnTo>
-                    <a:pt x="5085199" y="1748403"/>
-                  </a:lnTo>
-                  <a:lnTo>
-                    <a:pt x="5156821" y="1705249"/>
-                  </a:lnTo>
-                  <a:lnTo>
-                    <a:pt x="5228444" y="1660969"/>
-                  </a:lnTo>
-                  <a:lnTo>
-                    <a:pt x="5300066" y="1615532"/>
-                  </a:lnTo>
-                  <a:lnTo>
-                    <a:pt x="5371689" y="1568909"/>
-                  </a:lnTo>
-                  <a:lnTo>
-                    <a:pt x="5443311" y="1521070"/>
-                  </a:lnTo>
-                  <a:lnTo>
-                    <a:pt x="5514934" y="1471981"/>
-                  </a:lnTo>
-                  <a:lnTo>
-                    <a:pt x="5586557" y="1421611"/>
-                  </a:lnTo>
-                  <a:lnTo>
-                    <a:pt x="5658179" y="1369926"/>
-                  </a:lnTo>
-                  <a:lnTo>
-                    <a:pt x="5729802" y="1316891"/>
-                  </a:lnTo>
-                  <a:lnTo>
-                    <a:pt x="5801424" y="1262472"/>
-                  </a:lnTo>
-                  <a:lnTo>
-                    <a:pt x="5873047" y="1206633"/>
-                  </a:lnTo>
-                  <a:lnTo>
-                    <a:pt x="5944669" y="1149336"/>
-                  </a:lnTo>
-                  <a:lnTo>
-                    <a:pt x="6016292" y="1090543"/>
-                  </a:lnTo>
-                  <a:lnTo>
-                    <a:pt x="6087914" y="1030215"/>
-                  </a:lnTo>
-                  <a:lnTo>
-                    <a:pt x="6159537" y="968312"/>
-                  </a:lnTo>
-                  <a:lnTo>
-                    <a:pt x="6231159" y="904793"/>
-                  </a:lnTo>
-                  <a:lnTo>
-                    <a:pt x="6302782" y="839616"/>
-                  </a:lnTo>
-                  <a:lnTo>
-                    <a:pt x="6374404" y="772738"/>
-                  </a:lnTo>
-                  <a:lnTo>
-                    <a:pt x="6446027" y="704113"/>
-                  </a:lnTo>
-                  <a:lnTo>
-                    <a:pt x="6517649" y="633697"/>
-                  </a:lnTo>
-                  <a:lnTo>
-                    <a:pt x="6589272" y="561443"/>
-                  </a:lnTo>
-                  <a:lnTo>
-                    <a:pt x="6660894" y="487303"/>
-                  </a:lnTo>
-                  <a:lnTo>
-                    <a:pt x="6732517" y="411227"/>
-                  </a:lnTo>
-                  <a:lnTo>
-                    <a:pt x="6804139" y="333165"/>
-                  </a:lnTo>
-                  <a:lnTo>
-                    <a:pt x="6875762" y="253065"/>
-                  </a:lnTo>
-                  <a:lnTo>
-                    <a:pt x="6947385" y="170874"/>
-                  </a:lnTo>
-                  <a:lnTo>
-                    <a:pt x="7019007" y="86538"/>
+                    <a:pt x="71622" y="2689339"/>
+                  </a:lnTo>
+                  <a:lnTo>
+                    <a:pt x="143245" y="2688438"/>
+                  </a:lnTo>
+                  <a:lnTo>
+                    <a:pt x="214867" y="2687536"/>
+                  </a:lnTo>
+                  <a:lnTo>
+                    <a:pt x="286490" y="2686633"/>
+                  </a:lnTo>
+                  <a:lnTo>
+                    <a:pt x="358112" y="2685729"/>
+                  </a:lnTo>
+                  <a:lnTo>
+                    <a:pt x="429735" y="2684825"/>
+                  </a:lnTo>
+                  <a:lnTo>
+                    <a:pt x="501357" y="2683919"/>
+                  </a:lnTo>
+                  <a:lnTo>
+                    <a:pt x="572980" y="2683012"/>
+                  </a:lnTo>
+                  <a:lnTo>
+                    <a:pt x="644602" y="2682105"/>
+                  </a:lnTo>
+                  <a:lnTo>
+                    <a:pt x="716225" y="2681196"/>
+                  </a:lnTo>
+                  <a:lnTo>
+                    <a:pt x="787847" y="2680286"/>
+                  </a:lnTo>
+                  <a:lnTo>
+                    <a:pt x="859470" y="2679375"/>
+                  </a:lnTo>
+                  <a:lnTo>
+                    <a:pt x="931092" y="2678464"/>
+                  </a:lnTo>
+                  <a:lnTo>
+                    <a:pt x="1002715" y="2677551"/>
+                  </a:lnTo>
+                  <a:lnTo>
+                    <a:pt x="1074337" y="2676637"/>
+                  </a:lnTo>
+                  <a:lnTo>
+                    <a:pt x="1145960" y="2675723"/>
+                  </a:lnTo>
+                  <a:lnTo>
+                    <a:pt x="1217582" y="2674807"/>
+                  </a:lnTo>
+                  <a:lnTo>
+                    <a:pt x="1289205" y="2673891"/>
+                  </a:lnTo>
+                  <a:lnTo>
+                    <a:pt x="1360827" y="2672973"/>
+                  </a:lnTo>
+                  <a:lnTo>
+                    <a:pt x="1432450" y="2672054"/>
+                  </a:lnTo>
+                  <a:lnTo>
+                    <a:pt x="1504073" y="2671135"/>
+                  </a:lnTo>
+                  <a:lnTo>
+                    <a:pt x="1575695" y="2670214"/>
+                  </a:lnTo>
+                  <a:lnTo>
+                    <a:pt x="1647318" y="2669292"/>
+                  </a:lnTo>
+                  <a:lnTo>
+                    <a:pt x="1718940" y="2668370"/>
+                  </a:lnTo>
+                  <a:lnTo>
+                    <a:pt x="1790563" y="2667446"/>
+                  </a:lnTo>
+                  <a:lnTo>
+                    <a:pt x="1862185" y="2666521"/>
+                  </a:lnTo>
+                  <a:lnTo>
+                    <a:pt x="1933808" y="2665596"/>
+                  </a:lnTo>
+                  <a:lnTo>
+                    <a:pt x="2005430" y="2664669"/>
+                  </a:lnTo>
+                  <a:lnTo>
+                    <a:pt x="2077053" y="2663742"/>
+                  </a:lnTo>
+                  <a:lnTo>
+                    <a:pt x="2148675" y="2662813"/>
+                  </a:lnTo>
+                  <a:lnTo>
+                    <a:pt x="2220298" y="2661883"/>
+                  </a:lnTo>
+                  <a:lnTo>
+                    <a:pt x="2291920" y="2660952"/>
+                  </a:lnTo>
+                  <a:lnTo>
+                    <a:pt x="2363543" y="2660021"/>
+                  </a:lnTo>
+                  <a:lnTo>
+                    <a:pt x="2435165" y="2659088"/>
+                  </a:lnTo>
+                  <a:lnTo>
+                    <a:pt x="2506788" y="2658154"/>
+                  </a:lnTo>
+                  <a:lnTo>
+                    <a:pt x="2578410" y="2657220"/>
+                  </a:lnTo>
+                  <a:lnTo>
+                    <a:pt x="2650033" y="2656284"/>
+                  </a:lnTo>
+                  <a:lnTo>
+                    <a:pt x="2721655" y="2655347"/>
+                  </a:lnTo>
+                  <a:lnTo>
+                    <a:pt x="2793278" y="2654409"/>
+                  </a:lnTo>
+                  <a:lnTo>
+                    <a:pt x="2864901" y="2653470"/>
+                  </a:lnTo>
+                  <a:lnTo>
+                    <a:pt x="2936523" y="2652531"/>
+                  </a:lnTo>
+                  <a:lnTo>
+                    <a:pt x="3008146" y="2651590"/>
+                  </a:lnTo>
+                  <a:lnTo>
+                    <a:pt x="3079768" y="2650648"/>
+                  </a:lnTo>
+                  <a:lnTo>
+                    <a:pt x="3151391" y="2649705"/>
+                  </a:lnTo>
+                  <a:lnTo>
+                    <a:pt x="3223013" y="2648761"/>
+                  </a:lnTo>
+                  <a:lnTo>
+                    <a:pt x="3294636" y="2646938"/>
+                  </a:lnTo>
+                  <a:lnTo>
+                    <a:pt x="3366258" y="2623696"/>
+                  </a:lnTo>
+                  <a:lnTo>
+                    <a:pt x="3437881" y="2599834"/>
+                  </a:lnTo>
+                  <a:lnTo>
+                    <a:pt x="3509503" y="2575335"/>
+                  </a:lnTo>
+                  <a:lnTo>
+                    <a:pt x="3581126" y="2550182"/>
+                  </a:lnTo>
+                  <a:lnTo>
+                    <a:pt x="3652748" y="2524358"/>
+                  </a:lnTo>
+                  <a:lnTo>
+                    <a:pt x="3724371" y="2497844"/>
+                  </a:lnTo>
+                  <a:lnTo>
+                    <a:pt x="3795993" y="2470622"/>
+                  </a:lnTo>
+                  <a:lnTo>
+                    <a:pt x="3867616" y="2442674"/>
+                  </a:lnTo>
+                  <a:lnTo>
+                    <a:pt x="3939238" y="2413979"/>
+                  </a:lnTo>
+                  <a:lnTo>
+                    <a:pt x="4010861" y="2384519"/>
+                  </a:lnTo>
+                  <a:lnTo>
+                    <a:pt x="4082483" y="2354272"/>
+                  </a:lnTo>
+                  <a:lnTo>
+                    <a:pt x="4154106" y="2323217"/>
+                  </a:lnTo>
+                  <a:lnTo>
+                    <a:pt x="4225729" y="2291334"/>
+                  </a:lnTo>
+                  <a:lnTo>
+                    <a:pt x="4297351" y="2258599"/>
+                  </a:lnTo>
+                  <a:lnTo>
+                    <a:pt x="4368974" y="2224990"/>
+                  </a:lnTo>
+                  <a:lnTo>
+                    <a:pt x="4440596" y="2190484"/>
+                  </a:lnTo>
+                  <a:lnTo>
+                    <a:pt x="4512219" y="2155057"/>
+                  </a:lnTo>
+                  <a:lnTo>
+                    <a:pt x="4583841" y="2118684"/>
+                  </a:lnTo>
+                  <a:lnTo>
+                    <a:pt x="4655464" y="2081340"/>
+                  </a:lnTo>
+                  <a:lnTo>
+                    <a:pt x="4727086" y="2043000"/>
+                  </a:lnTo>
+                  <a:lnTo>
+                    <a:pt x="4798709" y="2003635"/>
+                  </a:lnTo>
+                  <a:lnTo>
+                    <a:pt x="4870331" y="1963220"/>
+                  </a:lnTo>
+                  <a:lnTo>
+                    <a:pt x="4941954" y="1921726"/>
+                  </a:lnTo>
+                  <a:lnTo>
+                    <a:pt x="5013576" y="1879124"/>
+                  </a:lnTo>
+                  <a:lnTo>
+                    <a:pt x="5085199" y="1835385"/>
+                  </a:lnTo>
+                  <a:lnTo>
+                    <a:pt x="5156821" y="1790478"/>
+                  </a:lnTo>
+                  <a:lnTo>
+                    <a:pt x="5228444" y="1744372"/>
+                  </a:lnTo>
+                  <a:lnTo>
+                    <a:pt x="5300066" y="1697036"/>
+                  </a:lnTo>
+                  <a:lnTo>
+                    <a:pt x="5371689" y="1648436"/>
+                  </a:lnTo>
+                  <a:lnTo>
+                    <a:pt x="5443311" y="1598538"/>
+                  </a:lnTo>
+                  <a:lnTo>
+                    <a:pt x="5514934" y="1547308"/>
+                  </a:lnTo>
+                  <a:lnTo>
+                    <a:pt x="5586557" y="1494711"/>
+                  </a:lnTo>
+                  <a:lnTo>
+                    <a:pt x="5658179" y="1440709"/>
+                  </a:lnTo>
+                  <a:lnTo>
+                    <a:pt x="5729802" y="1385266"/>
+                  </a:lnTo>
+                  <a:lnTo>
+                    <a:pt x="5801424" y="1328343"/>
+                  </a:lnTo>
+                  <a:lnTo>
+                    <a:pt x="5873047" y="1269900"/>
+                  </a:lnTo>
+                  <a:lnTo>
+                    <a:pt x="5944669" y="1209897"/>
+                  </a:lnTo>
+                  <a:lnTo>
+                    <a:pt x="6016292" y="1148292"/>
+                  </a:lnTo>
+                  <a:lnTo>
+                    <a:pt x="6087914" y="1085042"/>
+                  </a:lnTo>
+                  <a:lnTo>
+                    <a:pt x="6159537" y="1020104"/>
+                  </a:lnTo>
+                  <a:lnTo>
+                    <a:pt x="6231159" y="953432"/>
+                  </a:lnTo>
+                  <a:lnTo>
+                    <a:pt x="6302782" y="884981"/>
+                  </a:lnTo>
+                  <a:lnTo>
+                    <a:pt x="6374404" y="814702"/>
+                  </a:lnTo>
+                  <a:lnTo>
+                    <a:pt x="6446027" y="742547"/>
+                  </a:lnTo>
+                  <a:lnTo>
+                    <a:pt x="6517649" y="668465"/>
+                  </a:lnTo>
+                  <a:lnTo>
+                    <a:pt x="6589272" y="592406"/>
+                  </a:lnTo>
+                  <a:lnTo>
+                    <a:pt x="6660894" y="514316"/>
+                  </a:lnTo>
+                  <a:lnTo>
+                    <a:pt x="6732517" y="434142"/>
+                  </a:lnTo>
+                  <a:lnTo>
+                    <a:pt x="6804139" y="351828"/>
+                  </a:lnTo>
+                  <a:lnTo>
+                    <a:pt x="6875762" y="267315"/>
+                  </a:lnTo>
+                  <a:lnTo>
+                    <a:pt x="6947385" y="180547"/>
+                  </a:lnTo>
+                  <a:lnTo>
+                    <a:pt x="7019007" y="91462"/>
                   </a:lnTo>
                   <a:lnTo>
                     <a:pt x="7090630" y="0"/>
@@ -3915,312 +3915,312 @@
           </p:nvSpPr>
           <p:spPr>
             <a:xfrm>
-              <a:off x="1172049" y="4651215"/>
-              <a:ext cx="7090630" cy="632748"/>
+              <a:off x="1172049" y="4627910"/>
+              <a:ext cx="7090630" cy="662186"/>
             </a:xfrm>
             <a:custGeom>
               <a:avLst/>
               <a:pathLst>
-                <a:path w="7090630" h="632748">
+                <a:path w="7090630" h="662186">
                   <a:moveTo>
                     <a:pt x="7090630" y="0"/>
                   </a:moveTo>
                   <a:lnTo>
-                    <a:pt x="7019007" y="543"/>
-                  </a:lnTo>
-                  <a:lnTo>
-                    <a:pt x="6947385" y="1086"/>
-                  </a:lnTo>
-                  <a:lnTo>
-                    <a:pt x="6875762" y="1629"/>
-                  </a:lnTo>
-                  <a:lnTo>
-                    <a:pt x="6804139" y="2171"/>
-                  </a:lnTo>
-                  <a:lnTo>
-                    <a:pt x="6732517" y="2714"/>
-                  </a:lnTo>
-                  <a:lnTo>
-                    <a:pt x="6660894" y="3255"/>
-                  </a:lnTo>
-                  <a:lnTo>
-                    <a:pt x="6589272" y="3797"/>
-                  </a:lnTo>
-                  <a:lnTo>
-                    <a:pt x="6517649" y="4338"/>
-                  </a:lnTo>
-                  <a:lnTo>
-                    <a:pt x="6446027" y="4879"/>
-                  </a:lnTo>
-                  <a:lnTo>
-                    <a:pt x="6374404" y="5420"/>
-                  </a:lnTo>
-                  <a:lnTo>
-                    <a:pt x="6302782" y="5960"/>
-                  </a:lnTo>
-                  <a:lnTo>
-                    <a:pt x="6231159" y="6500"/>
-                  </a:lnTo>
-                  <a:lnTo>
-                    <a:pt x="6159537" y="7039"/>
-                  </a:lnTo>
-                  <a:lnTo>
-                    <a:pt x="6087914" y="7578"/>
-                  </a:lnTo>
-                  <a:lnTo>
-                    <a:pt x="6016292" y="8117"/>
-                  </a:lnTo>
-                  <a:lnTo>
-                    <a:pt x="5944669" y="8656"/>
-                  </a:lnTo>
-                  <a:lnTo>
-                    <a:pt x="5873047" y="9194"/>
-                  </a:lnTo>
-                  <a:lnTo>
-                    <a:pt x="5801424" y="9732"/>
-                  </a:lnTo>
-                  <a:lnTo>
-                    <a:pt x="5729802" y="10270"/>
-                  </a:lnTo>
-                  <a:lnTo>
-                    <a:pt x="5658179" y="10807"/>
-                  </a:lnTo>
-                  <a:lnTo>
-                    <a:pt x="5586557" y="11344"/>
-                  </a:lnTo>
-                  <a:lnTo>
-                    <a:pt x="5514934" y="11881"/>
-                  </a:lnTo>
-                  <a:lnTo>
-                    <a:pt x="5443311" y="12417"/>
-                  </a:lnTo>
-                  <a:lnTo>
-                    <a:pt x="5371689" y="12953"/>
-                  </a:lnTo>
-                  <a:lnTo>
-                    <a:pt x="5300066" y="13488"/>
-                  </a:lnTo>
-                  <a:lnTo>
-                    <a:pt x="5228444" y="14024"/>
-                  </a:lnTo>
-                  <a:lnTo>
-                    <a:pt x="5156821" y="14559"/>
-                  </a:lnTo>
-                  <a:lnTo>
-                    <a:pt x="5085199" y="15093"/>
-                  </a:lnTo>
-                  <a:lnTo>
-                    <a:pt x="5013576" y="15628"/>
-                  </a:lnTo>
-                  <a:lnTo>
-                    <a:pt x="4941954" y="16162"/>
-                  </a:lnTo>
-                  <a:lnTo>
-                    <a:pt x="4870331" y="16696"/>
-                  </a:lnTo>
-                  <a:lnTo>
-                    <a:pt x="4798709" y="17229"/>
-                  </a:lnTo>
-                  <a:lnTo>
-                    <a:pt x="4727086" y="17762"/>
-                  </a:lnTo>
-                  <a:lnTo>
-                    <a:pt x="4655464" y="18295"/>
-                  </a:lnTo>
-                  <a:lnTo>
-                    <a:pt x="4583841" y="18827"/>
-                  </a:lnTo>
-                  <a:lnTo>
-                    <a:pt x="4512219" y="19359"/>
-                  </a:lnTo>
-                  <a:lnTo>
-                    <a:pt x="4440596" y="19891"/>
-                  </a:lnTo>
-                  <a:lnTo>
-                    <a:pt x="4368974" y="20422"/>
-                  </a:lnTo>
-                  <a:lnTo>
-                    <a:pt x="4297351" y="20954"/>
-                  </a:lnTo>
-                  <a:lnTo>
-                    <a:pt x="4225729" y="21484"/>
-                  </a:lnTo>
-                  <a:lnTo>
-                    <a:pt x="4154106" y="22015"/>
-                  </a:lnTo>
-                  <a:lnTo>
-                    <a:pt x="4082483" y="22545"/>
-                  </a:lnTo>
-                  <a:lnTo>
-                    <a:pt x="4010861" y="23075"/>
-                  </a:lnTo>
-                  <a:lnTo>
-                    <a:pt x="3939238" y="23604"/>
-                  </a:lnTo>
-                  <a:lnTo>
-                    <a:pt x="3867616" y="24134"/>
-                  </a:lnTo>
-                  <a:lnTo>
-                    <a:pt x="3795993" y="24663"/>
-                  </a:lnTo>
-                  <a:lnTo>
-                    <a:pt x="3724371" y="25191"/>
-                  </a:lnTo>
-                  <a:lnTo>
-                    <a:pt x="3652748" y="25719"/>
-                  </a:lnTo>
-                  <a:lnTo>
-                    <a:pt x="3581126" y="26247"/>
-                  </a:lnTo>
-                  <a:lnTo>
-                    <a:pt x="3509503" y="26775"/>
-                  </a:lnTo>
-                  <a:lnTo>
-                    <a:pt x="3437881" y="27302"/>
-                  </a:lnTo>
-                  <a:lnTo>
-                    <a:pt x="3366258" y="27829"/>
-                  </a:lnTo>
-                  <a:lnTo>
-                    <a:pt x="3294636" y="30068"/>
-                  </a:lnTo>
-                  <a:lnTo>
-                    <a:pt x="3223013" y="52149"/>
-                  </a:lnTo>
-                  <a:lnTo>
-                    <a:pt x="3151391" y="73668"/>
-                  </a:lnTo>
-                  <a:lnTo>
-                    <a:pt x="3079768" y="94641"/>
-                  </a:lnTo>
-                  <a:lnTo>
-                    <a:pt x="3008146" y="115079"/>
-                  </a:lnTo>
-                  <a:lnTo>
-                    <a:pt x="2936523" y="134998"/>
-                  </a:lnTo>
-                  <a:lnTo>
-                    <a:pt x="2864901" y="154409"/>
-                  </a:lnTo>
-                  <a:lnTo>
-                    <a:pt x="2793278" y="173327"/>
-                  </a:lnTo>
-                  <a:lnTo>
-                    <a:pt x="2721655" y="191764"/>
-                  </a:lnTo>
-                  <a:lnTo>
-                    <a:pt x="2650033" y="209731"/>
-                  </a:lnTo>
-                  <a:lnTo>
-                    <a:pt x="2578410" y="227242"/>
-                  </a:lnTo>
-                  <a:lnTo>
-                    <a:pt x="2506788" y="244307"/>
-                  </a:lnTo>
-                  <a:lnTo>
-                    <a:pt x="2435165" y="260937"/>
-                  </a:lnTo>
-                  <a:lnTo>
-                    <a:pt x="2363543" y="277145"/>
-                  </a:lnTo>
-                  <a:lnTo>
-                    <a:pt x="2291920" y="292940"/>
-                  </a:lnTo>
-                  <a:lnTo>
-                    <a:pt x="2220298" y="308334"/>
-                  </a:lnTo>
-                  <a:lnTo>
-                    <a:pt x="2148675" y="323336"/>
-                  </a:lnTo>
-                  <a:lnTo>
-                    <a:pt x="2077053" y="337956"/>
-                  </a:lnTo>
-                  <a:lnTo>
-                    <a:pt x="2005430" y="352204"/>
-                  </a:lnTo>
-                  <a:lnTo>
-                    <a:pt x="1933808" y="366090"/>
-                  </a:lnTo>
-                  <a:lnTo>
-                    <a:pt x="1862185" y="379622"/>
-                  </a:lnTo>
-                  <a:lnTo>
-                    <a:pt x="1790563" y="392810"/>
-                  </a:lnTo>
-                  <a:lnTo>
-                    <a:pt x="1718940" y="405663"/>
-                  </a:lnTo>
-                  <a:lnTo>
-                    <a:pt x="1647318" y="418188"/>
-                  </a:lnTo>
-                  <a:lnTo>
-                    <a:pt x="1575695" y="430395"/>
-                  </a:lnTo>
-                  <a:lnTo>
-                    <a:pt x="1504073" y="442292"/>
-                  </a:lnTo>
-                  <a:lnTo>
-                    <a:pt x="1432450" y="453886"/>
-                  </a:lnTo>
-                  <a:lnTo>
-                    <a:pt x="1360827" y="465184"/>
-                  </a:lnTo>
-                  <a:lnTo>
-                    <a:pt x="1289205" y="476196"/>
-                  </a:lnTo>
-                  <a:lnTo>
-                    <a:pt x="1217582" y="486927"/>
-                  </a:lnTo>
-                  <a:lnTo>
-                    <a:pt x="1145960" y="497385"/>
-                  </a:lnTo>
-                  <a:lnTo>
-                    <a:pt x="1074337" y="507577"/>
-                  </a:lnTo>
-                  <a:lnTo>
-                    <a:pt x="1002715" y="517510"/>
-                  </a:lnTo>
-                  <a:lnTo>
-                    <a:pt x="931092" y="527190"/>
-                  </a:lnTo>
-                  <a:lnTo>
-                    <a:pt x="859470" y="536624"/>
-                  </a:lnTo>
-                  <a:lnTo>
-                    <a:pt x="787847" y="545817"/>
-                  </a:lnTo>
-                  <a:lnTo>
-                    <a:pt x="716225" y="554777"/>
-                  </a:lnTo>
-                  <a:lnTo>
-                    <a:pt x="644602" y="563509"/>
-                  </a:lnTo>
-                  <a:lnTo>
-                    <a:pt x="572980" y="572019"/>
-                  </a:lnTo>
-                  <a:lnTo>
-                    <a:pt x="501357" y="580312"/>
-                  </a:lnTo>
-                  <a:lnTo>
-                    <a:pt x="429735" y="588394"/>
-                  </a:lnTo>
-                  <a:lnTo>
-                    <a:pt x="358112" y="596271"/>
-                  </a:lnTo>
-                  <a:lnTo>
-                    <a:pt x="286490" y="603947"/>
-                  </a:lnTo>
-                  <a:lnTo>
-                    <a:pt x="214867" y="611428"/>
-                  </a:lnTo>
-                  <a:lnTo>
-                    <a:pt x="143245" y="618719"/>
-                  </a:lnTo>
-                  <a:lnTo>
-                    <a:pt x="71622" y="625824"/>
-                  </a:lnTo>
-                  <a:lnTo>
-                    <a:pt x="0" y="632748"/>
+                    <a:pt x="7019007" y="1001"/>
+                  </a:lnTo>
+                  <a:lnTo>
+                    <a:pt x="6947385" y="2000"/>
+                  </a:lnTo>
+                  <a:lnTo>
+                    <a:pt x="6875762" y="2999"/>
+                  </a:lnTo>
+                  <a:lnTo>
+                    <a:pt x="6804139" y="3997"/>
+                  </a:lnTo>
+                  <a:lnTo>
+                    <a:pt x="6732517" y="4994"/>
+                  </a:lnTo>
+                  <a:lnTo>
+                    <a:pt x="6660894" y="5989"/>
+                  </a:lnTo>
+                  <a:lnTo>
+                    <a:pt x="6589272" y="6984"/>
+                  </a:lnTo>
+                  <a:lnTo>
+                    <a:pt x="6517649" y="7977"/>
+                  </a:lnTo>
+                  <a:lnTo>
+                    <a:pt x="6446027" y="8970"/>
+                  </a:lnTo>
+                  <a:lnTo>
+                    <a:pt x="6374404" y="9961"/>
+                  </a:lnTo>
+                  <a:lnTo>
+                    <a:pt x="6302782" y="10951"/>
+                  </a:lnTo>
+                  <a:lnTo>
+                    <a:pt x="6231159" y="11940"/>
+                  </a:lnTo>
+                  <a:lnTo>
+                    <a:pt x="6159537" y="12928"/>
+                  </a:lnTo>
+                  <a:lnTo>
+                    <a:pt x="6087914" y="13915"/>
+                  </a:lnTo>
+                  <a:lnTo>
+                    <a:pt x="6016292" y="14901"/>
+                  </a:lnTo>
+                  <a:lnTo>
+                    <a:pt x="5944669" y="15886"/>
+                  </a:lnTo>
+                  <a:lnTo>
+                    <a:pt x="5873047" y="16870"/>
+                  </a:lnTo>
+                  <a:lnTo>
+                    <a:pt x="5801424" y="17852"/>
+                  </a:lnTo>
+                  <a:lnTo>
+                    <a:pt x="5729802" y="18834"/>
+                  </a:lnTo>
+                  <a:lnTo>
+                    <a:pt x="5658179" y="19814"/>
+                  </a:lnTo>
+                  <a:lnTo>
+                    <a:pt x="5586557" y="20794"/>
+                  </a:lnTo>
+                  <a:lnTo>
+                    <a:pt x="5514934" y="21772"/>
+                  </a:lnTo>
+                  <a:lnTo>
+                    <a:pt x="5443311" y="22750"/>
+                  </a:lnTo>
+                  <a:lnTo>
+                    <a:pt x="5371689" y="23726"/>
+                  </a:lnTo>
+                  <a:lnTo>
+                    <a:pt x="5300066" y="24701"/>
+                  </a:lnTo>
+                  <a:lnTo>
+                    <a:pt x="5228444" y="25675"/>
+                  </a:lnTo>
+                  <a:lnTo>
+                    <a:pt x="5156821" y="26648"/>
+                  </a:lnTo>
+                  <a:lnTo>
+                    <a:pt x="5085199" y="27621"/>
+                  </a:lnTo>
+                  <a:lnTo>
+                    <a:pt x="5013576" y="28592"/>
+                  </a:lnTo>
+                  <a:lnTo>
+                    <a:pt x="4941954" y="29562"/>
+                  </a:lnTo>
+                  <a:lnTo>
+                    <a:pt x="4870331" y="30530"/>
+                  </a:lnTo>
+                  <a:lnTo>
+                    <a:pt x="4798709" y="31498"/>
+                  </a:lnTo>
+                  <a:lnTo>
+                    <a:pt x="4727086" y="32465"/>
+                  </a:lnTo>
+                  <a:lnTo>
+                    <a:pt x="4655464" y="33431"/>
+                  </a:lnTo>
+                  <a:lnTo>
+                    <a:pt x="4583841" y="34395"/>
+                  </a:lnTo>
+                  <a:lnTo>
+                    <a:pt x="4512219" y="35359"/>
+                  </a:lnTo>
+                  <a:lnTo>
+                    <a:pt x="4440596" y="36322"/>
+                  </a:lnTo>
+                  <a:lnTo>
+                    <a:pt x="4368974" y="37283"/>
+                  </a:lnTo>
+                  <a:lnTo>
+                    <a:pt x="4297351" y="38244"/>
+                  </a:lnTo>
+                  <a:lnTo>
+                    <a:pt x="4225729" y="39203"/>
+                  </a:lnTo>
+                  <a:lnTo>
+                    <a:pt x="4154106" y="40162"/>
+                  </a:lnTo>
+                  <a:lnTo>
+                    <a:pt x="4082483" y="41119"/>
+                  </a:lnTo>
+                  <a:lnTo>
+                    <a:pt x="4010861" y="42075"/>
+                  </a:lnTo>
+                  <a:lnTo>
+                    <a:pt x="3939238" y="43031"/>
+                  </a:lnTo>
+                  <a:lnTo>
+                    <a:pt x="3867616" y="43985"/>
+                  </a:lnTo>
+                  <a:lnTo>
+                    <a:pt x="3795993" y="44938"/>
+                  </a:lnTo>
+                  <a:lnTo>
+                    <a:pt x="3724371" y="45890"/>
+                  </a:lnTo>
+                  <a:lnTo>
+                    <a:pt x="3652748" y="46841"/>
+                  </a:lnTo>
+                  <a:lnTo>
+                    <a:pt x="3581126" y="47792"/>
+                  </a:lnTo>
+                  <a:lnTo>
+                    <a:pt x="3509503" y="48741"/>
+                  </a:lnTo>
+                  <a:lnTo>
+                    <a:pt x="3437881" y="49689"/>
+                  </a:lnTo>
+                  <a:lnTo>
+                    <a:pt x="3366258" y="50636"/>
+                  </a:lnTo>
+                  <a:lnTo>
+                    <a:pt x="3294636" y="51582"/>
+                  </a:lnTo>
+                  <a:lnTo>
+                    <a:pt x="3223013" y="73341"/>
+                  </a:lnTo>
+                  <a:lnTo>
+                    <a:pt x="3151391" y="95389"/>
+                  </a:lnTo>
+                  <a:lnTo>
+                    <a:pt x="3079768" y="116865"/>
+                  </a:lnTo>
+                  <a:lnTo>
+                    <a:pt x="3008146" y="137781"/>
+                  </a:lnTo>
+                  <a:lnTo>
+                    <a:pt x="2936523" y="158154"/>
+                  </a:lnTo>
+                  <a:lnTo>
+                    <a:pt x="2864901" y="177998"/>
+                  </a:lnTo>
+                  <a:lnTo>
+                    <a:pt x="2793278" y="197325"/>
+                  </a:lnTo>
+                  <a:lnTo>
+                    <a:pt x="2721655" y="216150"/>
+                  </a:lnTo>
+                  <a:lnTo>
+                    <a:pt x="2650033" y="234485"/>
+                  </a:lnTo>
+                  <a:lnTo>
+                    <a:pt x="2578410" y="252343"/>
+                  </a:lnTo>
+                  <a:lnTo>
+                    <a:pt x="2506788" y="269737"/>
+                  </a:lnTo>
+                  <a:lnTo>
+                    <a:pt x="2435165" y="286679"/>
+                  </a:lnTo>
+                  <a:lnTo>
+                    <a:pt x="2363543" y="303181"/>
+                  </a:lnTo>
+                  <a:lnTo>
+                    <a:pt x="2291920" y="319253"/>
+                  </a:lnTo>
+                  <a:lnTo>
+                    <a:pt x="2220298" y="334907"/>
+                  </a:lnTo>
+                  <a:lnTo>
+                    <a:pt x="2148675" y="350155"/>
+                  </a:lnTo>
+                  <a:lnTo>
+                    <a:pt x="2077053" y="365005"/>
+                  </a:lnTo>
+                  <a:lnTo>
+                    <a:pt x="2005430" y="379470"/>
+                  </a:lnTo>
+                  <a:lnTo>
+                    <a:pt x="1933808" y="393559"/>
+                  </a:lnTo>
+                  <a:lnTo>
+                    <a:pt x="1862185" y="407281"/>
+                  </a:lnTo>
+                  <a:lnTo>
+                    <a:pt x="1790563" y="420646"/>
+                  </a:lnTo>
+                  <a:lnTo>
+                    <a:pt x="1718940" y="433664"/>
+                  </a:lnTo>
+                  <a:lnTo>
+                    <a:pt x="1647318" y="446344"/>
+                  </a:lnTo>
+                  <a:lnTo>
+                    <a:pt x="1575695" y="458693"/>
+                  </a:lnTo>
+                  <a:lnTo>
+                    <a:pt x="1504073" y="470722"/>
+                  </a:lnTo>
+                  <a:lnTo>
+                    <a:pt x="1432450" y="482438"/>
+                  </a:lnTo>
+                  <a:lnTo>
+                    <a:pt x="1360827" y="493849"/>
+                  </a:lnTo>
+                  <a:lnTo>
+                    <a:pt x="1289205" y="504964"/>
+                  </a:lnTo>
+                  <a:lnTo>
+                    <a:pt x="1217582" y="515789"/>
+                  </a:lnTo>
+                  <a:lnTo>
+                    <a:pt x="1145960" y="526333"/>
+                  </a:lnTo>
+                  <a:lnTo>
+                    <a:pt x="1074337" y="536603"/>
+                  </a:lnTo>
+                  <a:lnTo>
+                    <a:pt x="1002715" y="546606"/>
+                  </a:lnTo>
+                  <a:lnTo>
+                    <a:pt x="931092" y="556348"/>
+                  </a:lnTo>
+                  <a:lnTo>
+                    <a:pt x="859470" y="565838"/>
+                  </a:lnTo>
+                  <a:lnTo>
+                    <a:pt x="787847" y="575080"/>
+                  </a:lnTo>
+                  <a:lnTo>
+                    <a:pt x="716225" y="584083"/>
+                  </a:lnTo>
+                  <a:lnTo>
+                    <a:pt x="644602" y="592851"/>
+                  </a:lnTo>
+                  <a:lnTo>
+                    <a:pt x="572980" y="601391"/>
+                  </a:lnTo>
+                  <a:lnTo>
+                    <a:pt x="501357" y="609709"/>
+                  </a:lnTo>
+                  <a:lnTo>
+                    <a:pt x="429735" y="617811"/>
+                  </a:lnTo>
+                  <a:lnTo>
+                    <a:pt x="358112" y="625703"/>
+                  </a:lnTo>
+                  <a:lnTo>
+                    <a:pt x="286490" y="633389"/>
+                  </a:lnTo>
+                  <a:lnTo>
+                    <a:pt x="214867" y="640875"/>
+                  </a:lnTo>
+                  <a:lnTo>
+                    <a:pt x="143245" y="648166"/>
+                  </a:lnTo>
+                  <a:lnTo>
+                    <a:pt x="71622" y="655268"/>
+                  </a:lnTo>
+                  <a:lnTo>
+                    <a:pt x="0" y="662186"/>
                   </a:lnTo>
                 </a:path>
               </a:pathLst>
@@ -4240,309 +4240,309 @@
           </p:nvSpPr>
           <p:spPr>
             <a:xfrm>
-              <a:off x="1172049" y="3801501"/>
-              <a:ext cx="7090630" cy="1274070"/>
+              <a:off x="1172049" y="3749015"/>
+              <a:ext cx="7090630" cy="1337201"/>
             </a:xfrm>
             <a:custGeom>
               <a:avLst/>
               <a:pathLst>
-                <a:path w="7090630" h="1274070">
+                <a:path w="7090630" h="1337201">
                   <a:moveTo>
-                    <a:pt x="0" y="1274070"/>
+                    <a:pt x="0" y="1337201"/>
                   </a:moveTo>
                   <a:lnTo>
-                    <a:pt x="71622" y="1267782"/>
-                  </a:lnTo>
-                  <a:lnTo>
-                    <a:pt x="143245" y="1261411"/>
-                  </a:lnTo>
-                  <a:lnTo>
-                    <a:pt x="214867" y="1254955"/>
-                  </a:lnTo>
-                  <a:lnTo>
-                    <a:pt x="286490" y="1248414"/>
-                  </a:lnTo>
-                  <a:lnTo>
-                    <a:pt x="358112" y="1241786"/>
-                  </a:lnTo>
-                  <a:lnTo>
-                    <a:pt x="429735" y="1235069"/>
-                  </a:lnTo>
-                  <a:lnTo>
-                    <a:pt x="501357" y="1228264"/>
-                  </a:lnTo>
-                  <a:lnTo>
-                    <a:pt x="572980" y="1221368"/>
-                  </a:lnTo>
-                  <a:lnTo>
-                    <a:pt x="644602" y="1214381"/>
-                  </a:lnTo>
-                  <a:lnTo>
-                    <a:pt x="716225" y="1207300"/>
-                  </a:lnTo>
-                  <a:lnTo>
-                    <a:pt x="787847" y="1200126"/>
-                  </a:lnTo>
-                  <a:lnTo>
-                    <a:pt x="859470" y="1192857"/>
-                  </a:lnTo>
-                  <a:lnTo>
-                    <a:pt x="931092" y="1185491"/>
-                  </a:lnTo>
-                  <a:lnTo>
-                    <a:pt x="1002715" y="1178027"/>
-                  </a:lnTo>
-                  <a:lnTo>
-                    <a:pt x="1074337" y="1170465"/>
-                  </a:lnTo>
-                  <a:lnTo>
-                    <a:pt x="1145960" y="1162802"/>
-                  </a:lnTo>
-                  <a:lnTo>
-                    <a:pt x="1217582" y="1155037"/>
-                  </a:lnTo>
-                  <a:lnTo>
-                    <a:pt x="1289205" y="1147169"/>
-                  </a:lnTo>
-                  <a:lnTo>
-                    <a:pt x="1360827" y="1139196"/>
-                  </a:lnTo>
-                  <a:lnTo>
-                    <a:pt x="1432450" y="1131118"/>
-                  </a:lnTo>
-                  <a:lnTo>
-                    <a:pt x="1504073" y="1122933"/>
-                  </a:lnTo>
-                  <a:lnTo>
-                    <a:pt x="1575695" y="1114639"/>
-                  </a:lnTo>
-                  <a:lnTo>
-                    <a:pt x="1647318" y="1106234"/>
-                  </a:lnTo>
-                  <a:lnTo>
-                    <a:pt x="1718940" y="1097719"/>
-                  </a:lnTo>
-                  <a:lnTo>
-                    <a:pt x="1790563" y="1089090"/>
-                  </a:lnTo>
-                  <a:lnTo>
-                    <a:pt x="1862185" y="1080346"/>
-                  </a:lnTo>
-                  <a:lnTo>
-                    <a:pt x="1933808" y="1071487"/>
-                  </a:lnTo>
-                  <a:lnTo>
-                    <a:pt x="2005430" y="1062510"/>
-                  </a:lnTo>
-                  <a:lnTo>
-                    <a:pt x="2077053" y="1053413"/>
-                  </a:lnTo>
-                  <a:lnTo>
-                    <a:pt x="2148675" y="1044196"/>
-                  </a:lnTo>
-                  <a:lnTo>
-                    <a:pt x="2220298" y="1034857"/>
-                  </a:lnTo>
-                  <a:lnTo>
-                    <a:pt x="2291920" y="1025394"/>
-                  </a:lnTo>
-                  <a:lnTo>
-                    <a:pt x="2363543" y="1015805"/>
-                  </a:lnTo>
-                  <a:lnTo>
-                    <a:pt x="2435165" y="1006088"/>
-                  </a:lnTo>
-                  <a:lnTo>
-                    <a:pt x="2506788" y="996243"/>
-                  </a:lnTo>
-                  <a:lnTo>
-                    <a:pt x="2578410" y="986267"/>
-                  </a:lnTo>
-                  <a:lnTo>
-                    <a:pt x="2650033" y="976159"/>
-                  </a:lnTo>
-                  <a:lnTo>
-                    <a:pt x="2721655" y="965916"/>
-                  </a:lnTo>
-                  <a:lnTo>
-                    <a:pt x="2793278" y="955537"/>
-                  </a:lnTo>
-                  <a:lnTo>
-                    <a:pt x="2864901" y="945021"/>
-                  </a:lnTo>
-                  <a:lnTo>
-                    <a:pt x="2936523" y="934365"/>
-                  </a:lnTo>
-                  <a:lnTo>
-                    <a:pt x="3008146" y="923568"/>
-                  </a:lnTo>
-                  <a:lnTo>
-                    <a:pt x="3079768" y="912627"/>
-                  </a:lnTo>
-                  <a:lnTo>
-                    <a:pt x="3151391" y="901541"/>
-                  </a:lnTo>
-                  <a:lnTo>
-                    <a:pt x="3223013" y="890308"/>
-                  </a:lnTo>
-                  <a:lnTo>
-                    <a:pt x="3294636" y="878925"/>
-                  </a:lnTo>
-                  <a:lnTo>
-                    <a:pt x="3366258" y="867392"/>
-                  </a:lnTo>
-                  <a:lnTo>
-                    <a:pt x="3437881" y="855705"/>
-                  </a:lnTo>
-                  <a:lnTo>
-                    <a:pt x="3509503" y="843864"/>
-                  </a:lnTo>
-                  <a:lnTo>
-                    <a:pt x="3581126" y="831865"/>
-                  </a:lnTo>
-                  <a:lnTo>
-                    <a:pt x="3652748" y="819706"/>
-                  </a:lnTo>
-                  <a:lnTo>
-                    <a:pt x="3724371" y="807387"/>
-                  </a:lnTo>
-                  <a:lnTo>
-                    <a:pt x="3795993" y="794904"/>
-                  </a:lnTo>
-                  <a:lnTo>
-                    <a:pt x="3867616" y="782255"/>
-                  </a:lnTo>
-                  <a:lnTo>
-                    <a:pt x="3939238" y="769438"/>
-                  </a:lnTo>
-                  <a:lnTo>
-                    <a:pt x="4010861" y="756451"/>
-                  </a:lnTo>
-                  <a:lnTo>
-                    <a:pt x="4082483" y="743292"/>
-                  </a:lnTo>
-                  <a:lnTo>
-                    <a:pt x="4154106" y="729958"/>
-                  </a:lnTo>
-                  <a:lnTo>
-                    <a:pt x="4225729" y="716447"/>
-                  </a:lnTo>
-                  <a:lnTo>
-                    <a:pt x="4297351" y="702756"/>
-                  </a:lnTo>
-                  <a:lnTo>
-                    <a:pt x="4368974" y="688884"/>
-                  </a:lnTo>
-                  <a:lnTo>
-                    <a:pt x="4440596" y="674828"/>
-                  </a:lnTo>
-                  <a:lnTo>
-                    <a:pt x="4512219" y="660585"/>
-                  </a:lnTo>
-                  <a:lnTo>
-                    <a:pt x="4583841" y="646153"/>
-                  </a:lnTo>
-                  <a:lnTo>
-                    <a:pt x="4655464" y="631529"/>
-                  </a:lnTo>
-                  <a:lnTo>
-                    <a:pt x="4727086" y="616712"/>
-                  </a:lnTo>
-                  <a:lnTo>
-                    <a:pt x="4798709" y="601697"/>
-                  </a:lnTo>
-                  <a:lnTo>
-                    <a:pt x="4870331" y="586483"/>
-                  </a:lnTo>
-                  <a:lnTo>
-                    <a:pt x="4941954" y="571068"/>
-                  </a:lnTo>
-                  <a:lnTo>
-                    <a:pt x="5013576" y="555447"/>
-                  </a:lnTo>
-                  <a:lnTo>
-                    <a:pt x="5085199" y="539619"/>
-                  </a:lnTo>
-                  <a:lnTo>
-                    <a:pt x="5156821" y="523582"/>
-                  </a:lnTo>
-                  <a:lnTo>
-                    <a:pt x="5228444" y="507331"/>
-                  </a:lnTo>
-                  <a:lnTo>
-                    <a:pt x="5300066" y="490864"/>
-                  </a:lnTo>
-                  <a:lnTo>
-                    <a:pt x="5371689" y="474179"/>
-                  </a:lnTo>
-                  <a:lnTo>
-                    <a:pt x="5443311" y="457273"/>
-                  </a:lnTo>
-                  <a:lnTo>
-                    <a:pt x="5514934" y="440141"/>
-                  </a:lnTo>
-                  <a:lnTo>
-                    <a:pt x="5586557" y="422783"/>
-                  </a:lnTo>
-                  <a:lnTo>
-                    <a:pt x="5658179" y="405194"/>
-                  </a:lnTo>
-                  <a:lnTo>
-                    <a:pt x="5729802" y="387372"/>
-                  </a:lnTo>
-                  <a:lnTo>
-                    <a:pt x="5801424" y="369313"/>
-                  </a:lnTo>
-                  <a:lnTo>
-                    <a:pt x="5873047" y="351014"/>
-                  </a:lnTo>
-                  <a:lnTo>
-                    <a:pt x="5944669" y="332472"/>
-                  </a:lnTo>
-                  <a:lnTo>
-                    <a:pt x="6016292" y="313684"/>
-                  </a:lnTo>
-                  <a:lnTo>
-                    <a:pt x="6087914" y="294647"/>
-                  </a:lnTo>
-                  <a:lnTo>
-                    <a:pt x="6159537" y="275357"/>
-                  </a:lnTo>
-                  <a:lnTo>
-                    <a:pt x="6231159" y="255811"/>
-                  </a:lnTo>
-                  <a:lnTo>
-                    <a:pt x="6302782" y="236005"/>
-                  </a:lnTo>
-                  <a:lnTo>
-                    <a:pt x="6374404" y="215937"/>
-                  </a:lnTo>
-                  <a:lnTo>
-                    <a:pt x="6446027" y="195602"/>
-                  </a:lnTo>
-                  <a:lnTo>
-                    <a:pt x="6517649" y="174997"/>
-                  </a:lnTo>
-                  <a:lnTo>
-                    <a:pt x="6589272" y="154119"/>
-                  </a:lnTo>
-                  <a:lnTo>
-                    <a:pt x="6660894" y="132963"/>
-                  </a:lnTo>
-                  <a:lnTo>
-                    <a:pt x="6732517" y="111527"/>
-                  </a:lnTo>
-                  <a:lnTo>
-                    <a:pt x="6804139" y="89806"/>
-                  </a:lnTo>
-                  <a:lnTo>
-                    <a:pt x="6875762" y="67796"/>
-                  </a:lnTo>
-                  <a:lnTo>
-                    <a:pt x="6947385" y="45495"/>
-                  </a:lnTo>
-                  <a:lnTo>
-                    <a:pt x="7019007" y="22897"/>
+                    <a:pt x="71622" y="1330806"/>
+                  </a:lnTo>
+                  <a:lnTo>
+                    <a:pt x="143245" y="1324324"/>
+                  </a:lnTo>
+                  <a:lnTo>
+                    <a:pt x="214867" y="1317751"/>
+                  </a:lnTo>
+                  <a:lnTo>
+                    <a:pt x="286490" y="1311088"/>
+                  </a:lnTo>
+                  <a:lnTo>
+                    <a:pt x="358112" y="1304333"/>
+                  </a:lnTo>
+                  <a:lnTo>
+                    <a:pt x="429735" y="1297485"/>
+                  </a:lnTo>
+                  <a:lnTo>
+                    <a:pt x="501357" y="1290542"/>
+                  </a:lnTo>
+                  <a:lnTo>
+                    <a:pt x="572980" y="1283503"/>
+                  </a:lnTo>
+                  <a:lnTo>
+                    <a:pt x="644602" y="1276367"/>
+                  </a:lnTo>
+                  <a:lnTo>
+                    <a:pt x="716225" y="1269133"/>
+                  </a:lnTo>
+                  <a:lnTo>
+                    <a:pt x="787847" y="1261798"/>
+                  </a:lnTo>
+                  <a:lnTo>
+                    <a:pt x="859470" y="1254362"/>
+                  </a:lnTo>
+                  <a:lnTo>
+                    <a:pt x="931092" y="1246824"/>
+                  </a:lnTo>
+                  <a:lnTo>
+                    <a:pt x="1002715" y="1239181"/>
+                  </a:lnTo>
+                  <a:lnTo>
+                    <a:pt x="1074337" y="1231433"/>
+                  </a:lnTo>
+                  <a:lnTo>
+                    <a:pt x="1145960" y="1223578"/>
+                  </a:lnTo>
+                  <a:lnTo>
+                    <a:pt x="1217582" y="1215614"/>
+                  </a:lnTo>
+                  <a:lnTo>
+                    <a:pt x="1289205" y="1207540"/>
+                  </a:lnTo>
+                  <a:lnTo>
+                    <a:pt x="1360827" y="1199355"/>
+                  </a:lnTo>
+                  <a:lnTo>
+                    <a:pt x="1432450" y="1191057"/>
+                  </a:lnTo>
+                  <a:lnTo>
+                    <a:pt x="1504073" y="1182644"/>
+                  </a:lnTo>
+                  <a:lnTo>
+                    <a:pt x="1575695" y="1174115"/>
+                  </a:lnTo>
+                  <a:lnTo>
+                    <a:pt x="1647318" y="1165469"/>
+                  </a:lnTo>
+                  <a:lnTo>
+                    <a:pt x="1718940" y="1156702"/>
+                  </a:lnTo>
+                  <a:lnTo>
+                    <a:pt x="1790563" y="1147815"/>
+                  </a:lnTo>
+                  <a:lnTo>
+                    <a:pt x="1862185" y="1138805"/>
+                  </a:lnTo>
+                  <a:lnTo>
+                    <a:pt x="1933808" y="1129671"/>
+                  </a:lnTo>
+                  <a:lnTo>
+                    <a:pt x="2005430" y="1120410"/>
+                  </a:lnTo>
+                  <a:lnTo>
+                    <a:pt x="2077053" y="1111021"/>
+                  </a:lnTo>
+                  <a:lnTo>
+                    <a:pt x="2148675" y="1101503"/>
+                  </a:lnTo>
+                  <a:lnTo>
+                    <a:pt x="2220298" y="1091854"/>
+                  </a:lnTo>
+                  <a:lnTo>
+                    <a:pt x="2291920" y="1082071"/>
+                  </a:lnTo>
+                  <a:lnTo>
+                    <a:pt x="2363543" y="1072153"/>
+                  </a:lnTo>
+                  <a:lnTo>
+                    <a:pt x="2435165" y="1062098"/>
+                  </a:lnTo>
+                  <a:lnTo>
+                    <a:pt x="2506788" y="1051904"/>
+                  </a:lnTo>
+                  <a:lnTo>
+                    <a:pt x="2578410" y="1041569"/>
+                  </a:lnTo>
+                  <a:lnTo>
+                    <a:pt x="2650033" y="1031092"/>
+                  </a:lnTo>
+                  <a:lnTo>
+                    <a:pt x="2721655" y="1020470"/>
+                  </a:lnTo>
+                  <a:lnTo>
+                    <a:pt x="2793278" y="1009701"/>
+                  </a:lnTo>
+                  <a:lnTo>
+                    <a:pt x="2864901" y="998783"/>
+                  </a:lnTo>
+                  <a:lnTo>
+                    <a:pt x="2936523" y="987715"/>
+                  </a:lnTo>
+                  <a:lnTo>
+                    <a:pt x="3008146" y="976494"/>
+                  </a:lnTo>
+                  <a:lnTo>
+                    <a:pt x="3079768" y="965118"/>
+                  </a:lnTo>
+                  <a:lnTo>
+                    <a:pt x="3151391" y="953584"/>
+                  </a:lnTo>
+                  <a:lnTo>
+                    <a:pt x="3223013" y="941892"/>
+                  </a:lnTo>
+                  <a:lnTo>
+                    <a:pt x="3294636" y="930038"/>
+                  </a:lnTo>
+                  <a:lnTo>
+                    <a:pt x="3366258" y="918020"/>
+                  </a:lnTo>
+                  <a:lnTo>
+                    <a:pt x="3437881" y="905836"/>
+                  </a:lnTo>
+                  <a:lnTo>
+                    <a:pt x="3509503" y="893484"/>
+                  </a:lnTo>
+                  <a:lnTo>
+                    <a:pt x="3581126" y="880962"/>
+                  </a:lnTo>
+                  <a:lnTo>
+                    <a:pt x="3652748" y="868266"/>
+                  </a:lnTo>
+                  <a:lnTo>
+                    <a:pt x="3724371" y="855395"/>
+                  </a:lnTo>
+                  <a:lnTo>
+                    <a:pt x="3795993" y="842346"/>
+                  </a:lnTo>
+                  <a:lnTo>
+                    <a:pt x="3867616" y="829118"/>
+                  </a:lnTo>
+                  <a:lnTo>
+                    <a:pt x="3939238" y="815706"/>
+                  </a:lnTo>
+                  <a:lnTo>
+                    <a:pt x="4010861" y="802109"/>
+                  </a:lnTo>
+                  <a:lnTo>
+                    <a:pt x="4082483" y="788325"/>
+                  </a:lnTo>
+                  <a:lnTo>
+                    <a:pt x="4154106" y="774350"/>
+                  </a:lnTo>
+                  <a:lnTo>
+                    <a:pt x="4225729" y="760182"/>
+                  </a:lnTo>
+                  <a:lnTo>
+                    <a:pt x="4297351" y="745818"/>
+                  </a:lnTo>
+                  <a:lnTo>
+                    <a:pt x="4368974" y="731256"/>
+                  </a:lnTo>
+                  <a:lnTo>
+                    <a:pt x="4440596" y="716493"/>
+                  </a:lnTo>
+                  <a:lnTo>
+                    <a:pt x="4512219" y="701526"/>
+                  </a:lnTo>
+                  <a:lnTo>
+                    <a:pt x="4583841" y="686352"/>
+                  </a:lnTo>
+                  <a:lnTo>
+                    <a:pt x="4655464" y="670969"/>
+                  </a:lnTo>
+                  <a:lnTo>
+                    <a:pt x="4727086" y="655373"/>
+                  </a:lnTo>
+                  <a:lnTo>
+                    <a:pt x="4798709" y="639562"/>
+                  </a:lnTo>
+                  <a:lnTo>
+                    <a:pt x="4870331" y="623532"/>
+                  </a:lnTo>
+                  <a:lnTo>
+                    <a:pt x="4941954" y="607281"/>
+                  </a:lnTo>
+                  <a:lnTo>
+                    <a:pt x="5013576" y="590806"/>
+                  </a:lnTo>
+                  <a:lnTo>
+                    <a:pt x="5085199" y="574103"/>
+                  </a:lnTo>
+                  <a:lnTo>
+                    <a:pt x="5156821" y="557169"/>
+                  </a:lnTo>
+                  <a:lnTo>
+                    <a:pt x="5228444" y="540002"/>
+                  </a:lnTo>
+                  <a:lnTo>
+                    <a:pt x="5300066" y="522597"/>
+                  </a:lnTo>
+                  <a:lnTo>
+                    <a:pt x="5371689" y="504952"/>
+                  </a:lnTo>
+                  <a:lnTo>
+                    <a:pt x="5443311" y="487064"/>
+                  </a:lnTo>
+                  <a:lnTo>
+                    <a:pt x="5514934" y="468928"/>
+                  </a:lnTo>
+                  <a:lnTo>
+                    <a:pt x="5586557" y="450542"/>
+                  </a:lnTo>
+                  <a:lnTo>
+                    <a:pt x="5658179" y="431902"/>
+                  </a:lnTo>
+                  <a:lnTo>
+                    <a:pt x="5729802" y="413004"/>
+                  </a:lnTo>
+                  <a:lnTo>
+                    <a:pt x="5801424" y="393845"/>
+                  </a:lnTo>
+                  <a:lnTo>
+                    <a:pt x="5873047" y="374422"/>
+                  </a:lnTo>
+                  <a:lnTo>
+                    <a:pt x="5944669" y="354731"/>
+                  </a:lnTo>
+                  <a:lnTo>
+                    <a:pt x="6016292" y="334767"/>
+                  </a:lnTo>
+                  <a:lnTo>
+                    <a:pt x="6087914" y="314528"/>
+                  </a:lnTo>
+                  <a:lnTo>
+                    <a:pt x="6159537" y="294010"/>
+                  </a:lnTo>
+                  <a:lnTo>
+                    <a:pt x="6231159" y="273208"/>
+                  </a:lnTo>
+                  <a:lnTo>
+                    <a:pt x="6302782" y="252118"/>
+                  </a:lnTo>
+                  <a:lnTo>
+                    <a:pt x="6374404" y="230738"/>
+                  </a:lnTo>
+                  <a:lnTo>
+                    <a:pt x="6446027" y="209062"/>
+                  </a:lnTo>
+                  <a:lnTo>
+                    <a:pt x="6517649" y="187087"/>
+                  </a:lnTo>
+                  <a:lnTo>
+                    <a:pt x="6589272" y="164808"/>
+                  </a:lnTo>
+                  <a:lnTo>
+                    <a:pt x="6660894" y="142222"/>
+                  </a:lnTo>
+                  <a:lnTo>
+                    <a:pt x="6732517" y="119323"/>
+                  </a:lnTo>
+                  <a:lnTo>
+                    <a:pt x="6804139" y="96109"/>
+                  </a:lnTo>
+                  <a:lnTo>
+                    <a:pt x="6875762" y="72573"/>
+                  </a:lnTo>
+                  <a:lnTo>
+                    <a:pt x="6947385" y="48713"/>
+                  </a:lnTo>
+                  <a:lnTo>
+                    <a:pt x="7019007" y="24523"/>
                   </a:lnTo>
                   <a:lnTo>
                     <a:pt x="7090630" y="0"/>
@@ -4617,7 +4617,7 @@
           </p:nvSpPr>
           <p:spPr>
             <a:xfrm>
-              <a:off x="4472293" y="1896563"/>
+              <a:off x="4463824" y="1896563"/>
               <a:ext cx="0" cy="3826579"/>
             </a:xfrm>
             <a:custGeom>
@@ -4890,7 +4890,7 @@
           </p:nvSpPr>
           <p:spPr>
             <a:xfrm>
-              <a:off x="2004858" y="5785772"/>
+              <a:off x="2005445" y="5785772"/>
               <a:ext cx="223753" cy="80101"/>
             </a:xfrm>
             <a:prstGeom prst="rect">
@@ -4936,7 +4936,7 @@
           </p:nvSpPr>
           <p:spPr>
             <a:xfrm>
-              <a:off x="4499764" y="5785772"/>
+              <a:off x="4497209" y="5785772"/>
               <a:ext cx="62179" cy="80101"/>
             </a:xfrm>
             <a:prstGeom prst="rect">
@@ -4982,7 +4982,7 @@
           </p:nvSpPr>
           <p:spPr>
             <a:xfrm>
-              <a:off x="6851704" y="5785772"/>
+              <a:off x="6846007" y="5785772"/>
               <a:ext cx="186537" cy="80101"/>
             </a:xfrm>
             <a:prstGeom prst="rect">
